--- a/3.3 Bias correction.pptx
+++ b/3.3 Bias correction.pptx
@@ -271,7 +271,7 @@
       <p15:notesGuideLst xmlns:p15="http://schemas.microsoft.com/office/powerpoint/2012/main"/>
     </p:ext>
     <p:ext uri="http://customooxmlschemas.google.com/">
-      <go:slidesCustomData xmlns:mc="http://schemas.openxmlformats.org/markup-compatibility/2006" xmlns:mv="urn:schemas-microsoft-com:mac:vml" xmlns:c="http://schemas.openxmlformats.org/drawingml/2006/chart" xmlns:dgm="http://schemas.openxmlformats.org/drawingml/2006/diagram" xmlns:o="urn:schemas-microsoft-com:office:office" xmlns:v="urn:schemas-microsoft-com:vml" xmlns:pvml="urn:schemas-microsoft-com:office:powerpoint" xmlns:com="http://schemas.openxmlformats.org/drawingml/2006/compatibility" xmlns:p14="http://schemas.microsoft.com/office/powerpoint/2010/main" xmlns:p15="http://schemas.microsoft.com/office/powerpoint/2012/main" xmlns:ahyp="http://schemas.microsoft.com/office/drawing/2018/hyperlinkcolor" xmlns:go="http://customooxmlschemas.google.com/" xmlns="" r:id="rId59" roundtripDataSignature="AMtx7mh3YP3xexYcFoahXa2ehi0H5V4Zaw=="/>
+      <go:slidesCustomData xmlns="" xmlns:go="http://customooxmlschemas.google.com/" xmlns:ahyp="http://schemas.microsoft.com/office/drawing/2018/hyperlinkcolor" xmlns:p15="http://schemas.microsoft.com/office/powerpoint/2012/main" xmlns:p14="http://schemas.microsoft.com/office/powerpoint/2010/main" xmlns:com="http://schemas.openxmlformats.org/drawingml/2006/compatibility" xmlns:pvml="urn:schemas-microsoft-com:office:powerpoint" xmlns:v="urn:schemas-microsoft-com:vml" xmlns:o="urn:schemas-microsoft-com:office:office" xmlns:dgm="http://schemas.openxmlformats.org/drawingml/2006/diagram" xmlns:c="http://schemas.openxmlformats.org/drawingml/2006/chart" xmlns:mv="urn:schemas-microsoft-com:mac:vml" xmlns:mc="http://schemas.openxmlformats.org/markup-compatibility/2006" r:id="rId59" roundtripDataSignature="AMtx7mh3YP3xexYcFoahXa2ehi0H5V4Zaw=="/>
     </p:ext>
   </p:extLst>
 </p:presentation>
@@ -379,7 +379,7 @@
           <a:p>
             <a:fld id="{0CBFB8CE-488C-4A7E-87F2-3AF6127C51C1}" type="datetimeFigureOut">
               <a:rPr lang="en-IE" smtClean="0"/>
-              <a:t>28/08/2026</a:t>
+              <a:t>17/09/2026</a:t>
             </a:fld>
             <a:endParaRPr lang="en-IE"/>
           </a:p>
@@ -1665,6 +1665,115 @@
     </a:lvl9pPr>
   </p:notesStyle>
 </p:notesMaster>
+</file>
+
+<file path=ppt/notesSlides/notesSlide1.xml><?xml version="1.0" encoding="utf-8"?>
+<p:notes xmlns:a="http://schemas.openxmlformats.org/drawingml/2006/main" xmlns:r="http://schemas.openxmlformats.org/officeDocument/2006/relationships" xmlns:p="http://schemas.openxmlformats.org/presentationml/2006/main">
+  <p:cSld>
+    <p:spTree>
+      <p:nvGrpSpPr>
+        <p:cNvPr id="1" name=""/>
+        <p:cNvGrpSpPr/>
+        <p:nvPr/>
+      </p:nvGrpSpPr>
+      <p:grpSpPr>
+        <a:xfrm>
+          <a:off x="0" y="0"/>
+          <a:ext cx="0" cy="0"/>
+          <a:chOff x="0" y="0"/>
+          <a:chExt cx="0" cy="0"/>
+        </a:xfrm>
+      </p:grpSpPr>
+      <p:sp>
+        <p:nvSpPr>
+          <p:cNvPr id="2" name="Espace réservé de l'image des diapositives 1"/>
+          <p:cNvSpPr>
+            <a:spLocks noGrp="1" noRot="1" noChangeAspect="1"/>
+          </p:cNvSpPr>
+          <p:nvPr>
+            <p:ph type="sldImg"/>
+          </p:nvPr>
+        </p:nvSpPr>
+        <p:spPr/>
+      </p:sp>
+      <p:sp>
+        <p:nvSpPr>
+          <p:cNvPr id="3" name="Espace réservé des notes 2"/>
+          <p:cNvSpPr>
+            <a:spLocks noGrp="1"/>
+          </p:cNvSpPr>
+          <p:nvPr>
+            <p:ph type="body" idx="1"/>
+          </p:nvPr>
+        </p:nvSpPr>
+        <p:spPr/>
+        <p:txBody>
+          <a:bodyPr/>
+          <a:lstStyle/>
+          <a:p>
+            <a:endParaRPr lang="en-GB" dirty="0"/>
+          </a:p>
+        </p:txBody>
+      </p:sp>
+      <p:sp>
+        <p:nvSpPr>
+          <p:cNvPr id="4" name="Espace réservé du numéro de diapositive 3"/>
+          <p:cNvSpPr>
+            <a:spLocks noGrp="1"/>
+          </p:cNvSpPr>
+          <p:nvPr>
+            <p:ph type="sldNum" idx="12"/>
+          </p:nvPr>
+        </p:nvSpPr>
+        <p:spPr/>
+        <p:txBody>
+          <a:bodyPr/>
+          <a:lstStyle/>
+          <a:p>
+            <a:pPr marL="0" marR="0" lvl="0" indent="0" algn="r" rtl="0">
+              <a:spcBef>
+                <a:spcPts val="0"/>
+              </a:spcBef>
+              <a:spcAft>
+                <a:spcPts val="0"/>
+              </a:spcAft>
+              <a:buNone/>
+            </a:pPr>
+            <a:fld id="{00000000-1234-1234-1234-123412341234}" type="slidenum">
+              <a:rPr lang="en-GB" sz="1200" b="0" i="0" u="none" strike="noStrike" cap="none" smtClean="0">
+                <a:solidFill>
+                  <a:schemeClr val="dk1"/>
+                </a:solidFill>
+                <a:latin typeface="Calibri"/>
+                <a:ea typeface="Calibri"/>
+                <a:cs typeface="Calibri"/>
+                <a:sym typeface="Calibri"/>
+              </a:rPr>
+              <a:t>1</a:t>
+            </a:fld>
+            <a:endParaRPr lang="en-GB" sz="1200" b="0" i="0" u="none" strike="noStrike" cap="none">
+              <a:solidFill>
+                <a:schemeClr val="dk1"/>
+              </a:solidFill>
+              <a:latin typeface="Calibri"/>
+              <a:ea typeface="Calibri"/>
+              <a:cs typeface="Calibri"/>
+              <a:sym typeface="Calibri"/>
+            </a:endParaRPr>
+          </a:p>
+        </p:txBody>
+      </p:sp>
+    </p:spTree>
+    <p:extLst>
+      <p:ext uri="{BB962C8B-B14F-4D97-AF65-F5344CB8AC3E}">
+        <p14:creationId xmlns:p14="http://schemas.microsoft.com/office/powerpoint/2010/main" val="1136329172"/>
+      </p:ext>
+    </p:extLst>
+  </p:cSld>
+  <p:clrMapOvr>
+    <a:masterClrMapping/>
+  </p:clrMapOvr>
+</p:notes>
 </file>
 
 <file path=ppt/slideLayouts/slideLayout1.xml><?xml version="1.0" encoding="utf-8"?>
@@ -6450,8 +6559,8 @@
           </a:p>
         </p:txBody>
       </p:sp>
-      <mc:AlternateContent xmlns:mc="http://schemas.openxmlformats.org/markup-compatibility/2006" xmlns:a14="http://schemas.microsoft.com/office/drawing/2010/main">
-        <mc:Choice Requires="a14">
+      <mc:AlternateContent xmlns:mc="http://schemas.openxmlformats.org/markup-compatibility/2006">
+        <mc:Choice xmlns:a14="http://schemas.microsoft.com/office/drawing/2010/main" Requires="a14">
           <p:sp>
             <p:nvSpPr>
               <p:cNvPr id="3" name="Espace réservé du contenu 2">
@@ -6923,281 +7032,280 @@
                 <a:pPr marL="457200" lvl="1" indent="0" algn="ctr">
                   <a:buNone/>
                 </a:pPr>
-                <a:endParaRPr lang="en-GB" dirty="0"/>
+                <a14:m>
+                  <m:oMath xmlns:m="http://schemas.openxmlformats.org/officeDocument/2006/math">
+                    <m:nary>
+                      <m:naryPr>
+                        <m:chr m:val="∑"/>
+                        <m:supHide m:val="on"/>
+                        <m:ctrlPr>
+                          <a:rPr lang="en-GB" b="0" i="1" smtClean="0">
+                            <a:latin typeface="Cambria Math" panose="02040503050406030204" pitchFamily="18" charset="0"/>
+                          </a:rPr>
+                        </m:ctrlPr>
+                      </m:naryPr>
+                      <m:sub>
+                        <m:r>
+                          <m:rPr>
+                            <m:brk m:alnAt="7"/>
+                          </m:rPr>
+                          <a:rPr lang="en-GB" b="0" i="1" smtClean="0">
+                            <a:latin typeface="Cambria Math" panose="02040503050406030204" pitchFamily="18" charset="0"/>
+                          </a:rPr>
+                          <m:t>𝑦</m:t>
+                        </m:r>
+                        <m:r>
+                          <a:rPr lang="en-GB" b="0" i="1" smtClean="0">
+                            <a:latin typeface="Cambria Math" panose="02040503050406030204" pitchFamily="18" charset="0"/>
+                          </a:rPr>
+                          <m:t>𝑒𝑎𝑟𝑙𝑦</m:t>
+                        </m:r>
+                      </m:sub>
+                      <m:sup/>
+                      <m:e>
+                        <m:sSub>
+                          <m:sSubPr>
+                            <m:ctrlPr>
+                              <a:rPr lang="en-GB" b="0" i="1" smtClean="0">
+                                <a:latin typeface="Cambria Math" panose="02040503050406030204" pitchFamily="18" charset="0"/>
+                              </a:rPr>
+                            </m:ctrlPr>
+                          </m:sSubPr>
+                          <m:e>
+                            <m:r>
+                              <a:rPr lang="en-GB" b="0" i="1" smtClean="0">
+                                <a:latin typeface="Cambria Math" panose="02040503050406030204" pitchFamily="18" charset="0"/>
+                              </a:rPr>
+                              <m:t>𝑠</m:t>
+                            </m:r>
+                          </m:e>
+                          <m:sub>
+                            <m:r>
+                              <a:rPr lang="en-GB" b="0" i="1" smtClean="0">
+                                <a:latin typeface="Cambria Math" panose="02040503050406030204" pitchFamily="18" charset="0"/>
+                              </a:rPr>
+                              <m:t>𝑡</m:t>
+                            </m:r>
+                          </m:sub>
+                        </m:sSub>
+                      </m:e>
+                    </m:nary>
+                    <m:r>
+                      <a:rPr lang="en-GB" i="1" smtClean="0">
+                        <a:latin typeface="Cambria Math" panose="02040503050406030204" pitchFamily="18" charset="0"/>
+                        <a:ea typeface="Cambria Math" panose="02040503050406030204" pitchFamily="18" charset="0"/>
+                      </a:rPr>
+                      <m:t>≡</m:t>
+                    </m:r>
+                    <m:r>
+                      <a:rPr lang="en-GB" b="0" i="1" smtClean="0">
+                        <a:latin typeface="Cambria Math" panose="02040503050406030204" pitchFamily="18" charset="0"/>
+                        <a:ea typeface="Cambria Math" panose="02040503050406030204" pitchFamily="18" charset="0"/>
+                      </a:rPr>
+                      <m:t>0↔</m:t>
+                    </m:r>
+                    <m:rad>
+                      <m:radPr>
+                        <m:ctrlPr>
+                          <a:rPr lang="en-GB" b="0" i="1" smtClean="0">
+                            <a:latin typeface="Cambria Math" panose="02040503050406030204" pitchFamily="18" charset="0"/>
+                            <a:ea typeface="Cambria Math" panose="02040503050406030204" pitchFamily="18" charset="0"/>
+                          </a:rPr>
+                        </m:ctrlPr>
+                      </m:radPr>
+                      <m:deg>
+                        <m:r>
+                          <a:rPr lang="en-GB" b="0" i="1" smtClean="0">
+                            <a:latin typeface="Cambria Math" panose="02040503050406030204" pitchFamily="18" charset="0"/>
+                            <a:ea typeface="Cambria Math" panose="02040503050406030204" pitchFamily="18" charset="0"/>
+                          </a:rPr>
+                          <m:t>𝑝</m:t>
+                        </m:r>
+                      </m:deg>
+                      <m:e>
+                        <m:func>
+                          <m:funcPr>
+                            <m:ctrlPr>
+                              <a:rPr lang="en-GB" smtClean="0">
+                                <a:latin typeface="Cambria Math" panose="02040503050406030204" pitchFamily="18" charset="0"/>
+                              </a:rPr>
+                            </m:ctrlPr>
+                          </m:funcPr>
+                          <m:fName>
+                            <m:r>
+                              <m:rPr>
+                                <m:sty m:val="p"/>
+                              </m:rPr>
+                              <a:rPr lang="en-GB" smtClean="0">
+                                <a:latin typeface="Cambria Math" panose="02040503050406030204" pitchFamily="18" charset="0"/>
+                              </a:rPr>
+                              <m:t>exp</m:t>
+                            </m:r>
+                          </m:fName>
+                          <m:e>
+                            <m:sSub>
+                              <m:sSubPr>
+                                <m:ctrlPr>
+                                  <a:rPr lang="en-GB" i="1" smtClean="0">
+                                    <a:latin typeface="Cambria Math" panose="02040503050406030204" pitchFamily="18" charset="0"/>
+                                  </a:rPr>
+                                </m:ctrlPr>
+                              </m:sSubPr>
+                              <m:e>
+                                <m:r>
+                                  <a:rPr lang="en-GB" i="1" smtClean="0">
+                                    <a:latin typeface="Cambria Math" panose="02040503050406030204" pitchFamily="18" charset="0"/>
+                                  </a:rPr>
+                                  <m:t>𝑠</m:t>
+                                </m:r>
+                              </m:e>
+                              <m:sub>
+                                <m:r>
+                                  <a:rPr lang="en-GB" i="1" smtClean="0">
+                                    <a:latin typeface="Cambria Math" panose="02040503050406030204" pitchFamily="18" charset="0"/>
+                                  </a:rPr>
+                                  <m:t>𝑡</m:t>
+                                </m:r>
+                              </m:sub>
+                            </m:sSub>
+                          </m:e>
+                        </m:func>
+                      </m:e>
+                    </m:rad>
+                    <m:r>
+                      <a:rPr lang="en-GB" i="1">
+                        <a:latin typeface="Cambria Math" panose="02040503050406030204" pitchFamily="18" charset="0"/>
+                        <a:ea typeface="Cambria Math" panose="02040503050406030204" pitchFamily="18" charset="0"/>
+                      </a:rPr>
+                      <m:t>≡</m:t>
+                    </m:r>
+                    <m:r>
+                      <a:rPr lang="en-GB" b="0" i="1" smtClean="0">
+                        <a:latin typeface="Cambria Math" panose="02040503050406030204" pitchFamily="18" charset="0"/>
+                        <a:ea typeface="Cambria Math" panose="02040503050406030204" pitchFamily="18" charset="0"/>
+                      </a:rPr>
+                      <m:t>1</m:t>
+                    </m:r>
+                    <m:r>
+                      <a:rPr lang="en-GB" i="1" smtClean="0">
+                        <a:latin typeface="Cambria Math" panose="02040503050406030204" pitchFamily="18" charset="0"/>
+                        <a:ea typeface="Cambria Math" panose="02040503050406030204" pitchFamily="18" charset="0"/>
+                      </a:rPr>
+                      <m:t>↔</m:t>
+                    </m:r>
+                    <m:f>
+                      <m:fPr>
+                        <m:ctrlPr>
+                          <a:rPr lang="en-GB" b="0" i="1" smtClean="0">
+                            <a:latin typeface="Cambria Math" panose="02040503050406030204" pitchFamily="18" charset="0"/>
+                            <a:ea typeface="Cambria Math" panose="02040503050406030204" pitchFamily="18" charset="0"/>
+                          </a:rPr>
+                        </m:ctrlPr>
+                      </m:fPr>
+                      <m:num>
+                        <m:r>
+                          <a:rPr lang="en-GB" b="0" i="1" smtClean="0">
+                            <a:latin typeface="Cambria Math" panose="02040503050406030204" pitchFamily="18" charset="0"/>
+                            <a:ea typeface="Cambria Math" panose="02040503050406030204" pitchFamily="18" charset="0"/>
+                          </a:rPr>
+                          <m:t>1</m:t>
+                        </m:r>
+                      </m:num>
+                      <m:den>
+                        <m:r>
+                          <a:rPr lang="en-GB" b="0" i="1" smtClean="0">
+                            <a:latin typeface="Cambria Math" panose="02040503050406030204" pitchFamily="18" charset="0"/>
+                            <a:ea typeface="Cambria Math" panose="02040503050406030204" pitchFamily="18" charset="0"/>
+                          </a:rPr>
+                          <m:t>𝑝</m:t>
+                        </m:r>
+                      </m:den>
+                    </m:f>
+                    <m:nary>
+                      <m:naryPr>
+                        <m:chr m:val="∑"/>
+                        <m:supHide m:val="on"/>
+                        <m:ctrlPr>
+                          <a:rPr lang="en-GB" i="1" smtClean="0">
+                            <a:latin typeface="Cambria Math" panose="02040503050406030204" pitchFamily="18" charset="0"/>
+                          </a:rPr>
+                        </m:ctrlPr>
+                      </m:naryPr>
+                      <m:sub>
+                        <m:r>
+                          <m:rPr>
+                            <m:brk m:alnAt="7"/>
+                          </m:rPr>
+                          <a:rPr lang="en-GB" i="1" smtClean="0">
+                            <a:latin typeface="Cambria Math" panose="02040503050406030204" pitchFamily="18" charset="0"/>
+                          </a:rPr>
+                          <m:t>𝑦</m:t>
+                        </m:r>
+                        <m:r>
+                          <a:rPr lang="en-GB" i="1" smtClean="0">
+                            <a:latin typeface="Cambria Math" panose="02040503050406030204" pitchFamily="18" charset="0"/>
+                          </a:rPr>
+                          <m:t>𝑒𝑎𝑟𝑙𝑦</m:t>
+                        </m:r>
+                      </m:sub>
+                      <m:sup/>
+                      <m:e>
+                        <m:sSub>
+                          <m:sSubPr>
+                            <m:ctrlPr>
+                              <a:rPr lang="en-GB" b="0" i="1" smtClean="0">
+                                <a:latin typeface="Cambria Math" panose="02040503050406030204" pitchFamily="18" charset="0"/>
+                              </a:rPr>
+                            </m:ctrlPr>
+                          </m:sSubPr>
+                          <m:e>
+                            <m:r>
+                              <a:rPr lang="en-GB" b="0" i="1" smtClean="0">
+                                <a:latin typeface="Cambria Math" panose="02040503050406030204" pitchFamily="18" charset="0"/>
+                              </a:rPr>
+                              <m:t>𝑆</m:t>
+                            </m:r>
+                          </m:e>
+                          <m:sub>
+                            <m:r>
+                              <a:rPr lang="en-GB" i="1" smtClean="0">
+                                <a:latin typeface="Cambria Math" panose="02040503050406030204" pitchFamily="18" charset="0"/>
+                              </a:rPr>
+                              <m:t>𝑡</m:t>
+                            </m:r>
+                          </m:sub>
+                        </m:sSub>
+                      </m:e>
+                    </m:nary>
+                    <m:r>
+                      <a:rPr lang="en-GB" i="1" smtClean="0">
+                        <a:latin typeface="Cambria Math" panose="02040503050406030204" pitchFamily="18" charset="0"/>
+                        <a:ea typeface="Cambria Math" panose="02040503050406030204" pitchFamily="18" charset="0"/>
+                      </a:rPr>
+                      <m:t>&gt;</m:t>
+                    </m:r>
+                    <m:r>
+                      <a:rPr lang="en-GB" b="0" i="1" smtClean="0">
+                        <a:latin typeface="Cambria Math" panose="02040503050406030204" pitchFamily="18" charset="0"/>
+                        <a:ea typeface="Cambria Math" panose="02040503050406030204" pitchFamily="18" charset="0"/>
+                      </a:rPr>
+                      <m:t>1</m:t>
+                    </m:r>
+                  </m:oMath>
+                </a14:m>
+                <a:r>
+                  <a:rPr lang="en-GB" dirty="0"/>
+                  <a:t> </a:t>
+                </a:r>
               </a:p>
               <a:p>
                 <a:pPr marL="457200" lvl="1" indent="0" algn="ctr">
                   <a:buNone/>
                 </a:pPr>
-                <a14:m>
-                  <m:oMathPara xmlns:m="http://schemas.openxmlformats.org/officeDocument/2006/math">
-                    <m:oMath>
-                      <m:nary>
-                        <m:naryPr>
-                          <m:chr m:val="∑"/>
-                          <m:supHide m:val="on"/>
-                          <m:ctrlPr>
-                            <a:rPr lang="en-GB" b="0" i="1" smtClean="0">
-                              <a:latin typeface="Cambria Math" panose="02040503050406030204" pitchFamily="18" charset="0"/>
-                            </a:rPr>
-                          </m:ctrlPr>
-                        </m:naryPr>
-                        <m:sub>
-                          <m:r>
-                            <m:rPr>
-                              <m:brk m:alnAt="7"/>
-                            </m:rPr>
-                            <a:rPr lang="en-GB" b="0" i="1" smtClean="0">
-                              <a:latin typeface="Cambria Math" panose="02040503050406030204" pitchFamily="18" charset="0"/>
-                            </a:rPr>
-                            <m:t>𝑦</m:t>
-                          </m:r>
-                          <m:r>
-                            <a:rPr lang="en-GB" b="0" i="1" smtClean="0">
-                              <a:latin typeface="Cambria Math" panose="02040503050406030204" pitchFamily="18" charset="0"/>
-                            </a:rPr>
-                            <m:t>𝑒𝑎𝑟𝑙𝑦</m:t>
-                          </m:r>
-                        </m:sub>
-                        <m:sup/>
-                        <m:e>
-                          <m:sSub>
-                            <m:sSubPr>
-                              <m:ctrlPr>
-                                <a:rPr lang="en-GB" b="0" i="1" smtClean="0">
-                                  <a:latin typeface="Cambria Math" panose="02040503050406030204" pitchFamily="18" charset="0"/>
-                                </a:rPr>
-                              </m:ctrlPr>
-                            </m:sSubPr>
-                            <m:e>
-                              <m:r>
-                                <a:rPr lang="en-GB" b="0" i="1" smtClean="0">
-                                  <a:latin typeface="Cambria Math" panose="02040503050406030204" pitchFamily="18" charset="0"/>
-                                </a:rPr>
-                                <m:t>𝑠</m:t>
-                              </m:r>
-                            </m:e>
-                            <m:sub>
-                              <m:r>
-                                <a:rPr lang="en-GB" b="0" i="1" smtClean="0">
-                                  <a:latin typeface="Cambria Math" panose="02040503050406030204" pitchFamily="18" charset="0"/>
-                                </a:rPr>
-                                <m:t>𝑡</m:t>
-                              </m:r>
-                            </m:sub>
-                          </m:sSub>
-                        </m:e>
-                      </m:nary>
-                      <m:r>
-                        <a:rPr lang="en-GB" i="1" smtClean="0">
-                          <a:latin typeface="Cambria Math" panose="02040503050406030204" pitchFamily="18" charset="0"/>
-                          <a:ea typeface="Cambria Math" panose="02040503050406030204" pitchFamily="18" charset="0"/>
-                        </a:rPr>
-                        <m:t>≡</m:t>
-                      </m:r>
-                      <m:r>
-                        <a:rPr lang="en-GB" b="0" i="1" smtClean="0">
-                          <a:latin typeface="Cambria Math" panose="02040503050406030204" pitchFamily="18" charset="0"/>
-                          <a:ea typeface="Cambria Math" panose="02040503050406030204" pitchFamily="18" charset="0"/>
-                        </a:rPr>
-                        <m:t>0↔</m:t>
-                      </m:r>
-                      <m:rad>
-                        <m:radPr>
-                          <m:ctrlPr>
-                            <a:rPr lang="en-GB" b="0" i="1" smtClean="0">
-                              <a:latin typeface="Cambria Math" panose="02040503050406030204" pitchFamily="18" charset="0"/>
-                              <a:ea typeface="Cambria Math" panose="02040503050406030204" pitchFamily="18" charset="0"/>
-                            </a:rPr>
-                          </m:ctrlPr>
-                        </m:radPr>
-                        <m:deg>
-                          <m:r>
-                            <a:rPr lang="en-GB" b="0" i="1" smtClean="0">
-                              <a:latin typeface="Cambria Math" panose="02040503050406030204" pitchFamily="18" charset="0"/>
-                              <a:ea typeface="Cambria Math" panose="02040503050406030204" pitchFamily="18" charset="0"/>
-                            </a:rPr>
-                            <m:t>𝑝</m:t>
-                          </m:r>
-                        </m:deg>
-                        <m:e>
-                          <m:func>
-                            <m:funcPr>
-                              <m:ctrlPr>
-                                <a:rPr lang="en-GB" smtClean="0">
-                                  <a:latin typeface="Cambria Math" panose="02040503050406030204" pitchFamily="18" charset="0"/>
-                                </a:rPr>
-                              </m:ctrlPr>
-                            </m:funcPr>
-                            <m:fName>
-                              <m:r>
-                                <m:rPr>
-                                  <m:sty m:val="p"/>
-                                </m:rPr>
-                                <a:rPr lang="en-GB" smtClean="0">
-                                  <a:latin typeface="Cambria Math" panose="02040503050406030204" pitchFamily="18" charset="0"/>
-                                </a:rPr>
-                                <m:t>exp</m:t>
-                              </m:r>
-                            </m:fName>
-                            <m:e>
-                              <m:sSub>
-                                <m:sSubPr>
-                                  <m:ctrlPr>
-                                    <a:rPr lang="en-GB" i="1" smtClean="0">
-                                      <a:latin typeface="Cambria Math" panose="02040503050406030204" pitchFamily="18" charset="0"/>
-                                    </a:rPr>
-                                  </m:ctrlPr>
-                                </m:sSubPr>
-                                <m:e>
-                                  <m:r>
-                                    <a:rPr lang="en-GB" i="1" smtClean="0">
-                                      <a:latin typeface="Cambria Math" panose="02040503050406030204" pitchFamily="18" charset="0"/>
-                                    </a:rPr>
-                                    <m:t>𝑠</m:t>
-                                  </m:r>
-                                </m:e>
-                                <m:sub>
-                                  <m:r>
-                                    <a:rPr lang="en-GB" i="1" smtClean="0">
-                                      <a:latin typeface="Cambria Math" panose="02040503050406030204" pitchFamily="18" charset="0"/>
-                                    </a:rPr>
-                                    <m:t>𝑡</m:t>
-                                  </m:r>
-                                </m:sub>
-                              </m:sSub>
-                            </m:e>
-                          </m:func>
-                        </m:e>
-                      </m:rad>
-                      <m:r>
-                        <a:rPr lang="en-GB" i="1">
-                          <a:latin typeface="Cambria Math" panose="02040503050406030204" pitchFamily="18" charset="0"/>
-                          <a:ea typeface="Cambria Math" panose="02040503050406030204" pitchFamily="18" charset="0"/>
-                        </a:rPr>
-                        <m:t>≡</m:t>
-                      </m:r>
-                      <m:r>
-                        <a:rPr lang="en-GB" b="0" i="1" smtClean="0">
-                          <a:latin typeface="Cambria Math" panose="02040503050406030204" pitchFamily="18" charset="0"/>
-                          <a:ea typeface="Cambria Math" panose="02040503050406030204" pitchFamily="18" charset="0"/>
-                        </a:rPr>
-                        <m:t>1</m:t>
-                      </m:r>
-                      <m:r>
-                        <a:rPr lang="en-GB" i="1" smtClean="0">
-                          <a:latin typeface="Cambria Math" panose="02040503050406030204" pitchFamily="18" charset="0"/>
-                          <a:ea typeface="Cambria Math" panose="02040503050406030204" pitchFamily="18" charset="0"/>
-                        </a:rPr>
-                        <m:t>↔</m:t>
-                      </m:r>
-                      <m:f>
-                        <m:fPr>
-                          <m:ctrlPr>
-                            <a:rPr lang="en-GB" b="0" i="1" smtClean="0">
-                              <a:latin typeface="Cambria Math" panose="02040503050406030204" pitchFamily="18" charset="0"/>
-                              <a:ea typeface="Cambria Math" panose="02040503050406030204" pitchFamily="18" charset="0"/>
-                            </a:rPr>
-                          </m:ctrlPr>
-                        </m:fPr>
-                        <m:num>
-                          <m:r>
-                            <a:rPr lang="en-GB" b="0" i="1" smtClean="0">
-                              <a:latin typeface="Cambria Math" panose="02040503050406030204" pitchFamily="18" charset="0"/>
-                              <a:ea typeface="Cambria Math" panose="02040503050406030204" pitchFamily="18" charset="0"/>
-                            </a:rPr>
-                            <m:t>1</m:t>
-                          </m:r>
-                        </m:num>
-                        <m:den>
-                          <m:r>
-                            <a:rPr lang="en-GB" b="0" i="1" smtClean="0">
-                              <a:latin typeface="Cambria Math" panose="02040503050406030204" pitchFamily="18" charset="0"/>
-                              <a:ea typeface="Cambria Math" panose="02040503050406030204" pitchFamily="18" charset="0"/>
-                            </a:rPr>
-                            <m:t>𝑝</m:t>
-                          </m:r>
-                        </m:den>
-                      </m:f>
-                      <m:nary>
-                        <m:naryPr>
-                          <m:chr m:val="∑"/>
-                          <m:supHide m:val="on"/>
-                          <m:ctrlPr>
-                            <a:rPr lang="en-GB" i="1" smtClean="0">
-                              <a:latin typeface="Cambria Math" panose="02040503050406030204" pitchFamily="18" charset="0"/>
-                            </a:rPr>
-                          </m:ctrlPr>
-                        </m:naryPr>
-                        <m:sub>
-                          <m:r>
-                            <m:rPr>
-                              <m:brk m:alnAt="7"/>
-                            </m:rPr>
-                            <a:rPr lang="en-GB" i="1" smtClean="0">
-                              <a:latin typeface="Cambria Math" panose="02040503050406030204" pitchFamily="18" charset="0"/>
-                            </a:rPr>
-                            <m:t>𝑦</m:t>
-                          </m:r>
-                          <m:r>
-                            <a:rPr lang="en-GB" i="1" smtClean="0">
-                              <a:latin typeface="Cambria Math" panose="02040503050406030204" pitchFamily="18" charset="0"/>
-                            </a:rPr>
-                            <m:t>𝑒𝑎𝑟𝑙𝑦</m:t>
-                          </m:r>
-                        </m:sub>
-                        <m:sup/>
-                        <m:e>
-                          <m:sSub>
-                            <m:sSubPr>
-                              <m:ctrlPr>
-                                <a:rPr lang="en-GB" b="0" i="1" smtClean="0">
-                                  <a:latin typeface="Cambria Math" panose="02040503050406030204" pitchFamily="18" charset="0"/>
-                                </a:rPr>
-                              </m:ctrlPr>
-                            </m:sSubPr>
-                            <m:e>
-                              <m:r>
-                                <a:rPr lang="en-GB" b="0" i="1" smtClean="0">
-                                  <a:latin typeface="Cambria Math" panose="02040503050406030204" pitchFamily="18" charset="0"/>
-                                </a:rPr>
-                                <m:t>𝑆</m:t>
-                              </m:r>
-                            </m:e>
-                            <m:sub>
-                              <m:r>
-                                <a:rPr lang="en-GB" i="1" smtClean="0">
-                                  <a:latin typeface="Cambria Math" panose="02040503050406030204" pitchFamily="18" charset="0"/>
-                                </a:rPr>
-                                <m:t>𝑡</m:t>
-                              </m:r>
-                            </m:sub>
-                          </m:sSub>
-                        </m:e>
-                      </m:nary>
-                      <m:r>
-                        <a:rPr lang="en-GB" i="1" smtClean="0">
-                          <a:latin typeface="Cambria Math" panose="02040503050406030204" pitchFamily="18" charset="0"/>
-                          <a:ea typeface="Cambria Math" panose="02040503050406030204" pitchFamily="18" charset="0"/>
-                        </a:rPr>
-                        <m:t>&gt;</m:t>
-                      </m:r>
-                      <m:r>
-                        <a:rPr lang="en-GB" b="0" i="1" smtClean="0">
-                          <a:latin typeface="Cambria Math" panose="02040503050406030204" pitchFamily="18" charset="0"/>
-                          <a:ea typeface="Cambria Math" panose="02040503050406030204" pitchFamily="18" charset="0"/>
-                        </a:rPr>
-                        <m:t>1</m:t>
-                      </m:r>
-                    </m:oMath>
-                  </m:oMathPara>
-                </a14:m>
-                <a:endParaRPr lang="en-GB" dirty="0"/>
-              </a:p>
-              <a:p>
-                <a:pPr marL="457200" lvl="1" indent="0" algn="ctr">
-                  <a:buNone/>
-                </a:pPr>
+                <a:r>
+                  <a:rPr lang="en-GB" sz="1600" dirty="0"/>
+                  <a:t>(the arithmetic mean is always higher than the geometric mean)</a:t>
+                </a:r>
                 <a:endParaRPr lang="en-GB" dirty="0"/>
               </a:p>
               <a:p>
@@ -7396,7 +7504,7 @@
             </p:txBody>
           </p:sp>
         </mc:Choice>
-        <mc:Fallback xmlns="">
+        <mc:Fallback>
           <p:sp>
             <p:nvSpPr>
               <p:cNvPr id="3" name="Espace réservé du contenu 2">
@@ -7417,7 +7525,7 @@
               <a:blipFill>
                 <a:blip r:embed="rId2"/>
                 <a:stretch>
-                  <a:fillRect l="-1043" t="-2241"/>
+                  <a:fillRect l="-58" t="-1099"/>
                 </a:stretch>
               </a:blipFill>
             </p:spPr>
@@ -7546,13 +7654,8 @@
           <a:p>
             <a:r>
               <a:rPr lang="en-GB" dirty="0"/>
-              <a:t>Avoid log transformations </a:t>
+              <a:t>Avoid log transformations (multiplicative X11)</a:t>
             </a:r>
-            <a:r>
-              <a:rPr lang="en-GB"/>
-              <a:t>(multiplicative X11)</a:t>
-            </a:r>
-            <a:endParaRPr lang="en-GB" dirty="0"/>
           </a:p>
           <a:p>
             <a:r>
@@ -7912,7 +8015,7 @@
           <a:p>
             <a:r>
               <a:rPr lang="en-GB" dirty="0"/>
-              <a:t>No good solution if the seasonal factors highly differ following the periods</a:t>
+              <a:t>Currently no good solution in JD+ if the seasonal factors highly differ following the periods</a:t>
             </a:r>
           </a:p>
         </p:txBody>
@@ -8910,6 +9013,15 @@
 </file>
 
 <file path=customXml/item1.xml><?xml version="1.0" encoding="utf-8"?>
+<?mso-contentType ?>
+<FormTemplates xmlns="http://schemas.microsoft.com/sharepoint/v3/contenttype/forms">
+  <Display>DocumentLibraryForm</Display>
+  <Edit>DocumentLibraryForm</Edit>
+  <New>DocumentLibraryForm</New>
+</FormTemplates>
+</file>
+
+<file path=customXml/item2.xml><?xml version="1.0" encoding="utf-8"?>
 <ct:contentTypeSchema xmlns:ct="http://schemas.microsoft.com/office/2006/metadata/contentType" xmlns:ma="http://schemas.microsoft.com/office/2006/metadata/properties/metaAttributes" ct:_="" ma:_="" ma:contentTypeName="Document" ma:contentTypeID="0x010100E6AA5C57F8EADE4E9CD6BB064C0C3195" ma:contentTypeVersion="16" ma:contentTypeDescription="Create a new document." ma:contentTypeScope="" ma:versionID="bb51c19a58f458ddcddd050a07659236">
   <xsd:schema xmlns:xsd="http://www.w3.org/2001/XMLSchema" xmlns:xs="http://www.w3.org/2001/XMLSchema" xmlns:p="http://schemas.microsoft.com/office/2006/metadata/properties" xmlns:ns2="0e422b70-e85d-4377-8ee0-b6227433d381" xmlns:ns3="199f642e-5af9-486c-ac06-f366742ef41a" targetNamespace="http://schemas.microsoft.com/office/2006/metadata/properties" ma:root="true" ma:fieldsID="0ee7a3bac0352a48a43420936abd968a" ns2:_="" ns3:_="">
     <xsd:import namespace="0e422b70-e85d-4377-8ee0-b6227433d381"/>
@@ -9150,15 +9262,6 @@
 </ct:contentTypeSchema>
 </file>
 
-<file path=customXml/item2.xml><?xml version="1.0" encoding="utf-8"?>
-<?mso-contentType ?>
-<FormTemplates xmlns="http://schemas.microsoft.com/sharepoint/v3/contenttype/forms">
-  <Display>DocumentLibraryForm</Display>
-  <Edit>DocumentLibraryForm</Edit>
-  <New>DocumentLibraryForm</New>
-</FormTemplates>
-</file>
-
 <file path=customXml/item3.xml><?xml version="1.0" encoding="utf-8"?>
 <p:properties xmlns:p="http://schemas.microsoft.com/office/2006/metadata/properties" xmlns:xsi="http://www.w3.org/2001/XMLSchema-instance" xmlns:pc="http://schemas.microsoft.com/office/infopath/2007/PartnerControls">
   <documentManagement>
@@ -9171,6 +9274,14 @@
 </file>
 
 <file path=customXml/itemProps1.xml><?xml version="1.0" encoding="utf-8"?>
+<ds:datastoreItem xmlns:ds="http://schemas.openxmlformats.org/officeDocument/2006/customXml" ds:itemID="{67DD9E9F-9EEB-4105-B29B-819486C2855A}">
+  <ds:schemaRefs>
+    <ds:schemaRef ds:uri="http://schemas.microsoft.com/sharepoint/v3/contenttype/forms"/>
+  </ds:schemaRefs>
+</ds:datastoreItem>
+</file>
+
+<file path=customXml/itemProps2.xml><?xml version="1.0" encoding="utf-8"?>
 <ds:datastoreItem xmlns:ds="http://schemas.openxmlformats.org/officeDocument/2006/customXml" ds:itemID="{04B464EA-1576-49DD-9675-1E3399D4D196}">
   <ds:schemaRefs>
     <ds:schemaRef ds:uri="http://schemas.microsoft.com/office/2006/metadata/contentType"/>
@@ -9185,14 +9296,6 @@
     <ds:schemaRef ds:uri="http://purl.org/dc/elements/1.1/"/>
     <ds:schemaRef ds:uri="http://purl.org/dc/terms/"/>
     <ds:schemaRef ds:uri="http://schemas.microsoft.com/internal/obd"/>
-  </ds:schemaRefs>
-</ds:datastoreItem>
-</file>
-
-<file path=customXml/itemProps2.xml><?xml version="1.0" encoding="utf-8"?>
-<ds:datastoreItem xmlns:ds="http://schemas.openxmlformats.org/officeDocument/2006/customXml" ds:itemID="{67DD9E9F-9EEB-4105-B29B-819486C2855A}">
-  <ds:schemaRefs>
-    <ds:schemaRef ds:uri="http://schemas.microsoft.com/sharepoint/v3/contenttype/forms"/>
   </ds:schemaRefs>
 </ds:datastoreItem>
 </file>

--- a/3.3 Bias correction.pptx
+++ b/3.3 Bias correction.pptx
@@ -271,7 +271,7 @@
       <p15:notesGuideLst xmlns:p15="http://schemas.microsoft.com/office/powerpoint/2012/main"/>
     </p:ext>
     <p:ext uri="http://customooxmlschemas.google.com/">
-      <go:slidesCustomData xmlns="" xmlns:go="http://customooxmlschemas.google.com/" xmlns:ahyp="http://schemas.microsoft.com/office/drawing/2018/hyperlinkcolor" xmlns:p15="http://schemas.microsoft.com/office/powerpoint/2012/main" xmlns:p14="http://schemas.microsoft.com/office/powerpoint/2010/main" xmlns:com="http://schemas.openxmlformats.org/drawingml/2006/compatibility" xmlns:pvml="urn:schemas-microsoft-com:office:powerpoint" xmlns:v="urn:schemas-microsoft-com:vml" xmlns:o="urn:schemas-microsoft-com:office:office" xmlns:dgm="http://schemas.openxmlformats.org/drawingml/2006/diagram" xmlns:c="http://schemas.openxmlformats.org/drawingml/2006/chart" xmlns:mv="urn:schemas-microsoft-com:mac:vml" xmlns:mc="http://schemas.openxmlformats.org/markup-compatibility/2006" r:id="rId59" roundtripDataSignature="AMtx7mh3YP3xexYcFoahXa2ehi0H5V4Zaw=="/>
+      <go:slidesCustomData xmlns:mc="http://schemas.openxmlformats.org/markup-compatibility/2006" xmlns:mv="urn:schemas-microsoft-com:mac:vml" xmlns:c="http://schemas.openxmlformats.org/drawingml/2006/chart" xmlns:dgm="http://schemas.openxmlformats.org/drawingml/2006/diagram" xmlns:o="urn:schemas-microsoft-com:office:office" xmlns:v="urn:schemas-microsoft-com:vml" xmlns:pvml="urn:schemas-microsoft-com:office:powerpoint" xmlns:com="http://schemas.openxmlformats.org/drawingml/2006/compatibility" xmlns:p14="http://schemas.microsoft.com/office/powerpoint/2010/main" xmlns:p15="http://schemas.microsoft.com/office/powerpoint/2012/main" xmlns:ahyp="http://schemas.microsoft.com/office/drawing/2018/hyperlinkcolor" xmlns:go="http://customooxmlschemas.google.com/" xmlns="" r:id="rId59" roundtripDataSignature="AMtx7mh3YP3xexYcFoahXa2ehi0H5V4Zaw=="/>
     </p:ext>
   </p:extLst>
 </p:presentation>
@@ -379,7 +379,7 @@
           <a:p>
             <a:fld id="{0CBFB8CE-488C-4A7E-87F2-3AF6127C51C1}" type="datetimeFigureOut">
               <a:rPr lang="en-IE" smtClean="0"/>
-              <a:t>17/09/2026</a:t>
+              <a:t>28/09/2026</a:t>
             </a:fld>
             <a:endParaRPr lang="en-IE"/>
           </a:p>
@@ -2593,8 +2593,8 @@
         </p:nvSpPr>
         <p:spPr>
           <a:xfrm>
-            <a:off x="970722" y="1901951"/>
-            <a:ext cx="10515597" cy="4194176"/>
+            <a:off x="970722" y="1406106"/>
+            <a:ext cx="10515597" cy="4690021"/>
           </a:xfrm>
         </p:spPr>
         <p:txBody>
@@ -6574,7 +6574,7 @@
                 <a:spLocks noGrp="1"/>
               </p:cNvSpPr>
               <p:nvPr>
-                <p:ph idx="1"/>
+                <p:ph sz="half" idx="2"/>
               </p:nvPr>
             </p:nvSpPr>
             <p:spPr/>
@@ -6583,14 +6583,14 @@
               <a:lstStyle/>
               <a:p>
                 <a:r>
-                  <a:rPr lang="en-GB" dirty="0"/>
+                  <a:rPr lang="en-GB" sz="2800" dirty="0"/>
                   <a:t>Log-additive decompositions</a:t>
                 </a:r>
               </a:p>
               <a:p>
                 <a:pPr lvl="1"/>
                 <a:r>
-                  <a:rPr lang="en-GB" dirty="0"/>
+                  <a:rPr lang="en-GB" sz="2400" dirty="0"/>
                   <a:t>SEATS with log transformation, X11 with log-additive mode</a:t>
                 </a:r>
               </a:p>
@@ -6603,7 +6603,7 @@
                     <m:func>
                       <m:funcPr>
                         <m:ctrlPr>
-                          <a:rPr lang="en-GB" b="0" i="0" smtClean="0">
+                          <a:rPr lang="en-GB" sz="2400" b="0" i="0" smtClean="0">
                             <a:latin typeface="Cambria Math" panose="02040503050406030204" pitchFamily="18" charset="0"/>
                           </a:rPr>
                         </m:ctrlPr>
@@ -6613,7 +6613,7 @@
                           <m:rPr>
                             <m:sty m:val="p"/>
                           </m:rPr>
-                          <a:rPr lang="en-GB" b="0" i="0" smtClean="0">
+                          <a:rPr lang="en-GB" sz="2400" b="0" i="0" smtClean="0">
                             <a:latin typeface="Cambria Math" panose="02040503050406030204" pitchFamily="18" charset="0"/>
                           </a:rPr>
                           <m:t>log</m:t>
@@ -6623,14 +6623,14 @@
                         <m:sSub>
                           <m:sSubPr>
                             <m:ctrlPr>
-                              <a:rPr lang="en-GB" b="0" i="1" smtClean="0">
+                              <a:rPr lang="en-GB" sz="2400" b="0" i="1" smtClean="0">
                                 <a:latin typeface="Cambria Math" panose="02040503050406030204" pitchFamily="18" charset="0"/>
                               </a:rPr>
                             </m:ctrlPr>
                           </m:sSubPr>
                           <m:e>
                             <m:r>
-                              <a:rPr lang="en-GB" b="0" i="1" smtClean="0">
+                              <a:rPr lang="en-GB" sz="2400" b="0" i="1" smtClean="0">
                                 <a:latin typeface="Cambria Math" panose="02040503050406030204" pitchFamily="18" charset="0"/>
                               </a:rPr>
                               <m:t>𝑌</m:t>
@@ -6638,7 +6638,7 @@
                           </m:e>
                           <m:sub>
                             <m:r>
-                              <a:rPr lang="en-GB" b="0" i="1" smtClean="0">
+                              <a:rPr lang="en-GB" sz="2400" b="0" i="1" smtClean="0">
                                 <a:latin typeface="Cambria Math" panose="02040503050406030204" pitchFamily="18" charset="0"/>
                               </a:rPr>
                               <m:t>𝑡</m:t>
@@ -6648,7 +6648,7 @@
                       </m:e>
                     </m:func>
                     <m:r>
-                      <a:rPr lang="en-GB" b="0" i="1" smtClean="0">
+                      <a:rPr lang="en-GB" sz="2400" b="0" i="1" smtClean="0">
                         <a:latin typeface="Cambria Math" panose="02040503050406030204" pitchFamily="18" charset="0"/>
                       </a:rPr>
                       <m:t>=</m:t>
@@ -6656,14 +6656,14 @@
                     <m:sSub>
                       <m:sSubPr>
                         <m:ctrlPr>
-                          <a:rPr lang="en-GB" b="0" i="1" smtClean="0">
+                          <a:rPr lang="en-GB" sz="2400" b="0" i="1" smtClean="0">
                             <a:latin typeface="Cambria Math" panose="02040503050406030204" pitchFamily="18" charset="0"/>
                           </a:rPr>
                         </m:ctrlPr>
                       </m:sSubPr>
                       <m:e>
                         <m:r>
-                          <a:rPr lang="en-GB" b="0" i="1" smtClean="0">
+                          <a:rPr lang="en-GB" sz="2400" b="0" i="1" smtClean="0">
                             <a:latin typeface="Cambria Math" panose="02040503050406030204" pitchFamily="18" charset="0"/>
                           </a:rPr>
                           <m:t>𝑡</m:t>
@@ -6671,7 +6671,7 @@
                       </m:e>
                       <m:sub>
                         <m:r>
-                          <a:rPr lang="en-GB" i="1" smtClean="0">
+                          <a:rPr lang="en-GB" sz="2400" i="1" smtClean="0">
                             <a:latin typeface="Cambria Math" panose="02040503050406030204" pitchFamily="18" charset="0"/>
                           </a:rPr>
                           <m:t>𝑡</m:t>
@@ -6679,7 +6679,7 @@
                       </m:sub>
                     </m:sSub>
                     <m:r>
-                      <a:rPr lang="en-GB" b="0" i="1" smtClean="0">
+                      <a:rPr lang="en-GB" sz="2400" b="0" i="1" smtClean="0">
                         <a:latin typeface="Cambria Math" panose="02040503050406030204" pitchFamily="18" charset="0"/>
                       </a:rPr>
                       <m:t>+</m:t>
@@ -6687,14 +6687,14 @@
                     <m:sSub>
                       <m:sSubPr>
                         <m:ctrlPr>
-                          <a:rPr lang="en-GB" b="0" i="1" smtClean="0">
+                          <a:rPr lang="en-GB" sz="2400" b="0" i="1" smtClean="0">
                             <a:latin typeface="Cambria Math" panose="02040503050406030204" pitchFamily="18" charset="0"/>
                           </a:rPr>
                         </m:ctrlPr>
                       </m:sSubPr>
                       <m:e>
                         <m:r>
-                          <a:rPr lang="en-GB" b="0" i="1" smtClean="0">
+                          <a:rPr lang="en-GB" sz="2400" b="0" i="1" smtClean="0">
                             <a:latin typeface="Cambria Math" panose="02040503050406030204" pitchFamily="18" charset="0"/>
                           </a:rPr>
                           <m:t>𝑠</m:t>
@@ -6702,7 +6702,7 @@
                       </m:e>
                       <m:sub>
                         <m:r>
-                          <a:rPr lang="en-GB" i="1" smtClean="0">
+                          <a:rPr lang="en-GB" sz="2400" i="1" smtClean="0">
                             <a:latin typeface="Cambria Math" panose="02040503050406030204" pitchFamily="18" charset="0"/>
                           </a:rPr>
                           <m:t>𝑡</m:t>
@@ -6710,7 +6710,7 @@
                       </m:sub>
                     </m:sSub>
                     <m:r>
-                      <a:rPr lang="en-GB" b="0" i="1" smtClean="0">
+                      <a:rPr lang="en-GB" sz="2400" b="0" i="1" smtClean="0">
                         <a:latin typeface="Cambria Math" panose="02040503050406030204" pitchFamily="18" charset="0"/>
                       </a:rPr>
                       <m:t>+</m:t>
@@ -6718,14 +6718,14 @@
                     <m:sSub>
                       <m:sSubPr>
                         <m:ctrlPr>
-                          <a:rPr lang="en-GB" b="0" i="1" smtClean="0">
+                          <a:rPr lang="en-GB" sz="2400" b="0" i="1" smtClean="0">
                             <a:latin typeface="Cambria Math" panose="02040503050406030204" pitchFamily="18" charset="0"/>
                           </a:rPr>
                         </m:ctrlPr>
                       </m:sSubPr>
                       <m:e>
                         <m:r>
-                          <a:rPr lang="en-GB" b="0" i="1" smtClean="0">
+                          <a:rPr lang="en-GB" sz="2400" b="0" i="1" smtClean="0">
                             <a:latin typeface="Cambria Math" panose="02040503050406030204" pitchFamily="18" charset="0"/>
                           </a:rPr>
                           <m:t>𝑖</m:t>
@@ -6733,7 +6733,7 @@
                       </m:e>
                       <m:sub>
                         <m:r>
-                          <a:rPr lang="en-GB" i="1" smtClean="0">
+                          <a:rPr lang="en-GB" sz="2400" i="1" smtClean="0">
                             <a:latin typeface="Cambria Math" panose="02040503050406030204" pitchFamily="18" charset="0"/>
                           </a:rPr>
                           <m:t>𝑡</m:t>
@@ -6743,7 +6743,7 @@
                   </m:oMath>
                 </a14:m>
                 <a:r>
-                  <a:rPr lang="en-GB" dirty="0"/>
+                  <a:rPr lang="en-GB" sz="2400" dirty="0"/>
                   <a:t> </a:t>
                 </a:r>
               </a:p>
@@ -6755,7 +6755,7 @@
                   <m:oMathPara xmlns:m="http://schemas.openxmlformats.org/officeDocument/2006/math">
                     <m:oMath>
                       <m:r>
-                        <a:rPr lang="en-GB" i="1" smtClean="0">
+                        <a:rPr lang="en-GB" sz="2400" i="1" smtClean="0">
                           <a:latin typeface="Cambria Math" panose="02040503050406030204" pitchFamily="18" charset="0"/>
                           <a:ea typeface="Cambria Math" panose="02040503050406030204" pitchFamily="18" charset="0"/>
                         </a:rPr>
@@ -6764,14 +6764,14 @@
                       <m:sSub>
                         <m:sSubPr>
                           <m:ctrlPr>
-                            <a:rPr lang="en-GB" b="0" i="1" smtClean="0">
+                            <a:rPr lang="en-GB" sz="2400" b="0" i="1" smtClean="0">
                               <a:latin typeface="Cambria Math" panose="02040503050406030204" pitchFamily="18" charset="0"/>
                             </a:rPr>
                           </m:ctrlPr>
                         </m:sSubPr>
                         <m:e>
                           <m:r>
-                            <a:rPr lang="en-GB" b="0" i="1" smtClean="0">
+                            <a:rPr lang="en-GB" sz="2400" b="0" i="1" smtClean="0">
                               <a:latin typeface="Cambria Math" panose="02040503050406030204" pitchFamily="18" charset="0"/>
                             </a:rPr>
                             <m:t>𝑌</m:t>
@@ -6779,7 +6779,7 @@
                         </m:e>
                         <m:sub>
                           <m:r>
-                            <a:rPr lang="en-GB" b="0" i="1" smtClean="0">
+                            <a:rPr lang="en-GB" sz="2400" b="0" i="1" smtClean="0">
                               <a:latin typeface="Cambria Math" panose="02040503050406030204" pitchFamily="18" charset="0"/>
                             </a:rPr>
                             <m:t>𝑡</m:t>
@@ -6787,7 +6787,7 @@
                         </m:sub>
                       </m:sSub>
                       <m:r>
-                        <a:rPr lang="en-GB" b="0" i="1" smtClean="0">
+                        <a:rPr lang="en-GB" sz="2400" b="0" i="1" smtClean="0">
                           <a:latin typeface="Cambria Math" panose="02040503050406030204" pitchFamily="18" charset="0"/>
                         </a:rPr>
                         <m:t>=</m:t>
@@ -6795,7 +6795,7 @@
                       <m:func>
                         <m:funcPr>
                           <m:ctrlPr>
-                            <a:rPr lang="en-GB" b="0" i="0" smtClean="0">
+                            <a:rPr lang="en-GB" sz="2400" b="0" i="0" smtClean="0">
                               <a:latin typeface="Cambria Math" panose="02040503050406030204" pitchFamily="18" charset="0"/>
                             </a:rPr>
                           </m:ctrlPr>
@@ -6805,7 +6805,7 @@
                             <m:rPr>
                               <m:sty m:val="p"/>
                             </m:rPr>
-                            <a:rPr lang="en-GB" b="0" i="0" smtClean="0">
+                            <a:rPr lang="en-GB" sz="2400" b="0" i="0" smtClean="0">
                               <a:latin typeface="Cambria Math" panose="02040503050406030204" pitchFamily="18" charset="0"/>
                             </a:rPr>
                             <m:t>exp</m:t>
@@ -6815,14 +6815,14 @@
                           <m:sSub>
                             <m:sSubPr>
                               <m:ctrlPr>
-                                <a:rPr lang="en-GB" i="1" smtClean="0">
+                                <a:rPr lang="en-GB" sz="2400" i="1" smtClean="0">
                                   <a:latin typeface="Cambria Math" panose="02040503050406030204" pitchFamily="18" charset="0"/>
                                 </a:rPr>
                               </m:ctrlPr>
                             </m:sSubPr>
                             <m:e>
                               <m:r>
-                                <a:rPr lang="en-GB" i="1" smtClean="0">
+                                <a:rPr lang="en-GB" sz="2400" i="1" smtClean="0">
                                   <a:latin typeface="Cambria Math" panose="02040503050406030204" pitchFamily="18" charset="0"/>
                                 </a:rPr>
                                 <m:t>𝑡</m:t>
@@ -6830,7 +6830,7 @@
                             </m:e>
                             <m:sub>
                               <m:r>
-                                <a:rPr lang="en-GB" i="1" smtClean="0">
+                                <a:rPr lang="en-GB" sz="2400" i="1" smtClean="0">
                                   <a:latin typeface="Cambria Math" panose="02040503050406030204" pitchFamily="18" charset="0"/>
                                 </a:rPr>
                                 <m:t>𝑡</m:t>
@@ -6840,7 +6840,7 @@
                         </m:e>
                       </m:func>
                       <m:r>
-                        <a:rPr lang="en-GB" i="1" smtClean="0">
+                        <a:rPr lang="en-GB" sz="2400" i="1" smtClean="0">
                           <a:latin typeface="Cambria Math" panose="02040503050406030204" pitchFamily="18" charset="0"/>
                           <a:ea typeface="Cambria Math" panose="02040503050406030204" pitchFamily="18" charset="0"/>
                         </a:rPr>
@@ -6849,7 +6849,7 @@
                       <m:func>
                         <m:funcPr>
                           <m:ctrlPr>
-                            <a:rPr lang="en-GB" smtClean="0">
+                            <a:rPr lang="en-GB" sz="2400" smtClean="0">
                               <a:latin typeface="Cambria Math" panose="02040503050406030204" pitchFamily="18" charset="0"/>
                             </a:rPr>
                           </m:ctrlPr>
@@ -6859,7 +6859,7 @@
                             <m:rPr>
                               <m:sty m:val="p"/>
                             </m:rPr>
-                            <a:rPr lang="en-GB" smtClean="0">
+                            <a:rPr lang="en-GB" sz="2400" smtClean="0">
                               <a:latin typeface="Cambria Math" panose="02040503050406030204" pitchFamily="18" charset="0"/>
                             </a:rPr>
                             <m:t>exp</m:t>
@@ -6869,14 +6869,14 @@
                           <m:sSub>
                             <m:sSubPr>
                               <m:ctrlPr>
-                                <a:rPr lang="en-GB" b="0" i="1" smtClean="0">
+                                <a:rPr lang="en-GB" sz="2400" b="0" i="1" smtClean="0">
                                   <a:latin typeface="Cambria Math" panose="02040503050406030204" pitchFamily="18" charset="0"/>
                                 </a:rPr>
                               </m:ctrlPr>
                             </m:sSubPr>
                             <m:e>
                               <m:r>
-                                <a:rPr lang="en-GB" b="0" i="1" smtClean="0">
+                                <a:rPr lang="en-GB" sz="2400" b="0" i="1" smtClean="0">
                                   <a:latin typeface="Cambria Math" panose="02040503050406030204" pitchFamily="18" charset="0"/>
                                 </a:rPr>
                                 <m:t>𝑠</m:t>
@@ -6884,7 +6884,7 @@
                             </m:e>
                             <m:sub>
                               <m:r>
-                                <a:rPr lang="en-GB" i="1" smtClean="0">
+                                <a:rPr lang="en-GB" sz="2400" i="1" smtClean="0">
                                   <a:latin typeface="Cambria Math" panose="02040503050406030204" pitchFamily="18" charset="0"/>
                                 </a:rPr>
                                 <m:t>𝑡</m:t>
@@ -6894,7 +6894,7 @@
                         </m:e>
                       </m:func>
                       <m:r>
-                        <a:rPr lang="en-GB" i="1" smtClean="0">
+                        <a:rPr lang="en-GB" sz="2400" i="1" smtClean="0">
                           <a:latin typeface="Cambria Math" panose="02040503050406030204" pitchFamily="18" charset="0"/>
                           <a:ea typeface="Cambria Math" panose="02040503050406030204" pitchFamily="18" charset="0"/>
                         </a:rPr>
@@ -6903,7 +6903,7 @@
                       <m:func>
                         <m:funcPr>
                           <m:ctrlPr>
-                            <a:rPr lang="en-GB" smtClean="0">
+                            <a:rPr lang="en-GB" sz="2400" smtClean="0">
                               <a:latin typeface="Cambria Math" panose="02040503050406030204" pitchFamily="18" charset="0"/>
                             </a:rPr>
                           </m:ctrlPr>
@@ -6913,7 +6913,7 @@
                             <m:rPr>
                               <m:sty m:val="p"/>
                             </m:rPr>
-                            <a:rPr lang="en-GB" smtClean="0">
+                            <a:rPr lang="en-GB" sz="2400" smtClean="0">
                               <a:latin typeface="Cambria Math" panose="02040503050406030204" pitchFamily="18" charset="0"/>
                             </a:rPr>
                             <m:t>exp</m:t>
@@ -6921,7 +6921,7 @@
                         </m:fName>
                         <m:e>
                           <m:r>
-                            <a:rPr lang="en-GB" b="0" i="1" smtClean="0">
+                            <a:rPr lang="en-GB" sz="2400" b="0" i="1" smtClean="0">
                               <a:latin typeface="Cambria Math" panose="02040503050406030204" pitchFamily="18" charset="0"/>
                             </a:rPr>
                             <m:t>𝑖</m:t>
@@ -6929,7 +6929,7 @@
                         </m:e>
                       </m:func>
                       <m:r>
-                        <a:rPr lang="en-GB" i="1" smtClean="0">
+                        <a:rPr lang="en-GB" sz="2400" i="1" smtClean="0">
                           <a:latin typeface="Cambria Math" panose="02040503050406030204" pitchFamily="18" charset="0"/>
                         </a:rPr>
                         <m:t>=</m:t>
@@ -6937,14 +6937,14 @@
                       <m:sSub>
                         <m:sSubPr>
                           <m:ctrlPr>
-                            <a:rPr lang="en-GB" i="1" smtClean="0">
+                            <a:rPr lang="en-GB" sz="2400" i="1" smtClean="0">
                               <a:latin typeface="Cambria Math" panose="02040503050406030204" pitchFamily="18" charset="0"/>
                             </a:rPr>
                           </m:ctrlPr>
                         </m:sSubPr>
                         <m:e>
                           <m:r>
-                            <a:rPr lang="en-GB" i="1" smtClean="0">
+                            <a:rPr lang="en-GB" sz="2400" i="1" smtClean="0">
                               <a:latin typeface="Cambria Math" panose="02040503050406030204" pitchFamily="18" charset="0"/>
                             </a:rPr>
                             <m:t>𝑇</m:t>
@@ -6952,7 +6952,7 @@
                         </m:e>
                         <m:sub>
                           <m:r>
-                            <a:rPr lang="en-GB" i="1" smtClean="0">
+                            <a:rPr lang="en-GB" sz="2400" i="1" smtClean="0">
                               <a:latin typeface="Cambria Math" panose="02040503050406030204" pitchFamily="18" charset="0"/>
                             </a:rPr>
                             <m:t>𝑡</m:t>
@@ -6960,7 +6960,7 @@
                         </m:sub>
                       </m:sSub>
                       <m:r>
-                        <a:rPr lang="en-GB" i="1" smtClean="0">
+                        <a:rPr lang="en-GB" sz="2400" i="1" smtClean="0">
                           <a:latin typeface="Cambria Math" panose="02040503050406030204" pitchFamily="18" charset="0"/>
                           <a:ea typeface="Cambria Math" panose="02040503050406030204" pitchFamily="18" charset="0"/>
                         </a:rPr>
@@ -6969,14 +6969,14 @@
                       <m:sSub>
                         <m:sSubPr>
                           <m:ctrlPr>
-                            <a:rPr lang="en-GB" i="1" smtClean="0">
+                            <a:rPr lang="en-GB" sz="2400" i="1" smtClean="0">
                               <a:latin typeface="Cambria Math" panose="02040503050406030204" pitchFamily="18" charset="0"/>
                             </a:rPr>
                           </m:ctrlPr>
                         </m:sSubPr>
                         <m:e>
                           <m:r>
-                            <a:rPr lang="en-GB" i="1" smtClean="0">
+                            <a:rPr lang="en-GB" sz="2400" i="1" smtClean="0">
                               <a:latin typeface="Cambria Math" panose="02040503050406030204" pitchFamily="18" charset="0"/>
                             </a:rPr>
                             <m:t>𝑆</m:t>
@@ -6984,7 +6984,7 @@
                         </m:e>
                         <m:sub>
                           <m:r>
-                            <a:rPr lang="en-GB" i="1" smtClean="0">
+                            <a:rPr lang="en-GB" sz="2400" i="1" smtClean="0">
                               <a:latin typeface="Cambria Math" panose="02040503050406030204" pitchFamily="18" charset="0"/>
                             </a:rPr>
                             <m:t>𝑡</m:t>
@@ -6992,7 +6992,7 @@
                         </m:sub>
                       </m:sSub>
                       <m:r>
-                        <a:rPr lang="en-GB" i="1" smtClean="0">
+                        <a:rPr lang="en-GB" sz="2400" i="1" smtClean="0">
                           <a:latin typeface="Cambria Math" panose="02040503050406030204" pitchFamily="18" charset="0"/>
                           <a:ea typeface="Cambria Math" panose="02040503050406030204" pitchFamily="18" charset="0"/>
                         </a:rPr>
@@ -7001,14 +7001,14 @@
                       <m:sSub>
                         <m:sSubPr>
                           <m:ctrlPr>
-                            <a:rPr lang="en-GB" i="1" smtClean="0">
+                            <a:rPr lang="en-GB" sz="2400" i="1" smtClean="0">
                               <a:latin typeface="Cambria Math" panose="02040503050406030204" pitchFamily="18" charset="0"/>
                             </a:rPr>
                           </m:ctrlPr>
                         </m:sSubPr>
                         <m:e>
                           <m:r>
-                            <a:rPr lang="en-GB" i="1" smtClean="0">
+                            <a:rPr lang="en-GB" sz="2400" i="1" smtClean="0">
                               <a:latin typeface="Cambria Math" panose="02040503050406030204" pitchFamily="18" charset="0"/>
                             </a:rPr>
                             <m:t>𝐼</m:t>
@@ -7016,7 +7016,7 @@
                         </m:e>
                         <m:sub>
                           <m:r>
-                            <a:rPr lang="en-GB" i="1" smtClean="0">
+                            <a:rPr lang="en-GB" sz="2400" i="1" smtClean="0">
                               <a:latin typeface="Cambria Math" panose="02040503050406030204" pitchFamily="18" charset="0"/>
                             </a:rPr>
                             <m:t>𝑡</m:t>
@@ -7026,7 +7026,7 @@
                     </m:oMath>
                   </m:oMathPara>
                 </a14:m>
-                <a:endParaRPr lang="en-GB" dirty="0"/>
+                <a:endParaRPr lang="en-GB" sz="2400" dirty="0"/>
               </a:p>
               <a:p>
                 <a:pPr marL="457200" lvl="1" indent="0" algn="ctr">
@@ -7039,7 +7039,7 @@
                         <m:chr m:val="∑"/>
                         <m:supHide m:val="on"/>
                         <m:ctrlPr>
-                          <a:rPr lang="en-GB" b="0" i="1" smtClean="0">
+                          <a:rPr lang="en-GB" sz="2400" b="0" i="1" smtClean="0">
                             <a:latin typeface="Cambria Math" panose="02040503050406030204" pitchFamily="18" charset="0"/>
                           </a:rPr>
                         </m:ctrlPr>
@@ -7049,13 +7049,13 @@
                           <m:rPr>
                             <m:brk m:alnAt="7"/>
                           </m:rPr>
-                          <a:rPr lang="en-GB" b="0" i="1" smtClean="0">
+                          <a:rPr lang="en-GB" sz="2400" b="0" i="1" smtClean="0">
                             <a:latin typeface="Cambria Math" panose="02040503050406030204" pitchFamily="18" charset="0"/>
                           </a:rPr>
                           <m:t>𝑦</m:t>
                         </m:r>
                         <m:r>
-                          <a:rPr lang="en-GB" b="0" i="1" smtClean="0">
+                          <a:rPr lang="en-GB" sz="2400" b="0" i="1" smtClean="0">
                             <a:latin typeface="Cambria Math" panose="02040503050406030204" pitchFamily="18" charset="0"/>
                           </a:rPr>
                           <m:t>𝑒𝑎𝑟𝑙𝑦</m:t>
@@ -7066,14 +7066,14 @@
                         <m:sSub>
                           <m:sSubPr>
                             <m:ctrlPr>
-                              <a:rPr lang="en-GB" b="0" i="1" smtClean="0">
+                              <a:rPr lang="en-GB" sz="2400" b="0" i="1" smtClean="0">
                                 <a:latin typeface="Cambria Math" panose="02040503050406030204" pitchFamily="18" charset="0"/>
                               </a:rPr>
                             </m:ctrlPr>
                           </m:sSubPr>
                           <m:e>
                             <m:r>
-                              <a:rPr lang="en-GB" b="0" i="1" smtClean="0">
+                              <a:rPr lang="en-GB" sz="2400" b="0" i="1" smtClean="0">
                                 <a:latin typeface="Cambria Math" panose="02040503050406030204" pitchFamily="18" charset="0"/>
                               </a:rPr>
                               <m:t>𝑠</m:t>
@@ -7081,7 +7081,7 @@
                           </m:e>
                           <m:sub>
                             <m:r>
-                              <a:rPr lang="en-GB" b="0" i="1" smtClean="0">
+                              <a:rPr lang="en-GB" sz="2400" b="0" i="1" smtClean="0">
                                 <a:latin typeface="Cambria Math" panose="02040503050406030204" pitchFamily="18" charset="0"/>
                               </a:rPr>
                               <m:t>𝑡</m:t>
@@ -7091,14 +7091,14 @@
                       </m:e>
                     </m:nary>
                     <m:r>
-                      <a:rPr lang="en-GB" i="1" smtClean="0">
+                      <a:rPr lang="en-GB" sz="2400" i="1" smtClean="0">
                         <a:latin typeface="Cambria Math" panose="02040503050406030204" pitchFamily="18" charset="0"/>
                         <a:ea typeface="Cambria Math" panose="02040503050406030204" pitchFamily="18" charset="0"/>
                       </a:rPr>
                       <m:t>≡</m:t>
                     </m:r>
                     <m:r>
-                      <a:rPr lang="en-GB" b="0" i="1" smtClean="0">
+                      <a:rPr lang="en-GB" sz="2400" b="0" i="1" smtClean="0">
                         <a:latin typeface="Cambria Math" panose="02040503050406030204" pitchFamily="18" charset="0"/>
                         <a:ea typeface="Cambria Math" panose="02040503050406030204" pitchFamily="18" charset="0"/>
                       </a:rPr>
@@ -7107,7 +7107,7 @@
                     <m:rad>
                       <m:radPr>
                         <m:ctrlPr>
-                          <a:rPr lang="en-GB" b="0" i="1" smtClean="0">
+                          <a:rPr lang="en-GB" sz="2400" b="0" i="1" smtClean="0">
                             <a:latin typeface="Cambria Math" panose="02040503050406030204" pitchFamily="18" charset="0"/>
                             <a:ea typeface="Cambria Math" panose="02040503050406030204" pitchFamily="18" charset="0"/>
                           </a:rPr>
@@ -7115,7 +7115,7 @@
                       </m:radPr>
                       <m:deg>
                         <m:r>
-                          <a:rPr lang="en-GB" b="0" i="1" smtClean="0">
+                          <a:rPr lang="en-GB" sz="2400" b="0" i="1" smtClean="0">
                             <a:latin typeface="Cambria Math" panose="02040503050406030204" pitchFamily="18" charset="0"/>
                             <a:ea typeface="Cambria Math" panose="02040503050406030204" pitchFamily="18" charset="0"/>
                           </a:rPr>
@@ -7126,7 +7126,7 @@
                         <m:func>
                           <m:funcPr>
                             <m:ctrlPr>
-                              <a:rPr lang="en-GB" smtClean="0">
+                              <a:rPr lang="en-GB" sz="2400" smtClean="0">
                                 <a:latin typeface="Cambria Math" panose="02040503050406030204" pitchFamily="18" charset="0"/>
                               </a:rPr>
                             </m:ctrlPr>
@@ -7136,7 +7136,7 @@
                               <m:rPr>
                                 <m:sty m:val="p"/>
                               </m:rPr>
-                              <a:rPr lang="en-GB" smtClean="0">
+                              <a:rPr lang="en-GB" sz="2400" smtClean="0">
                                 <a:latin typeface="Cambria Math" panose="02040503050406030204" pitchFamily="18" charset="0"/>
                               </a:rPr>
                               <m:t>exp</m:t>
@@ -7146,14 +7146,14 @@
                             <m:sSub>
                               <m:sSubPr>
                                 <m:ctrlPr>
-                                  <a:rPr lang="en-GB" i="1" smtClean="0">
+                                  <a:rPr lang="en-GB" sz="2400" i="1" smtClean="0">
                                     <a:latin typeface="Cambria Math" panose="02040503050406030204" pitchFamily="18" charset="0"/>
                                   </a:rPr>
                                 </m:ctrlPr>
                               </m:sSubPr>
                               <m:e>
                                 <m:r>
-                                  <a:rPr lang="en-GB" i="1" smtClean="0">
+                                  <a:rPr lang="en-GB" sz="2400" i="1" smtClean="0">
                                     <a:latin typeface="Cambria Math" panose="02040503050406030204" pitchFamily="18" charset="0"/>
                                   </a:rPr>
                                   <m:t>𝑠</m:t>
@@ -7161,7 +7161,7 @@
                               </m:e>
                               <m:sub>
                                 <m:r>
-                                  <a:rPr lang="en-GB" i="1" smtClean="0">
+                                  <a:rPr lang="en-GB" sz="2400" i="1" smtClean="0">
                                     <a:latin typeface="Cambria Math" panose="02040503050406030204" pitchFamily="18" charset="0"/>
                                   </a:rPr>
                                   <m:t>𝑡</m:t>
@@ -7173,21 +7173,21 @@
                       </m:e>
                     </m:rad>
                     <m:r>
-                      <a:rPr lang="en-GB" i="1">
+                      <a:rPr lang="en-GB" sz="2400" i="1">
                         <a:latin typeface="Cambria Math" panose="02040503050406030204" pitchFamily="18" charset="0"/>
                         <a:ea typeface="Cambria Math" panose="02040503050406030204" pitchFamily="18" charset="0"/>
                       </a:rPr>
                       <m:t>≡</m:t>
                     </m:r>
                     <m:r>
-                      <a:rPr lang="en-GB" b="0" i="1" smtClean="0">
+                      <a:rPr lang="en-GB" sz="2400" b="0" i="1" smtClean="0">
                         <a:latin typeface="Cambria Math" panose="02040503050406030204" pitchFamily="18" charset="0"/>
                         <a:ea typeface="Cambria Math" panose="02040503050406030204" pitchFamily="18" charset="0"/>
                       </a:rPr>
                       <m:t>1</m:t>
                     </m:r>
                     <m:r>
-                      <a:rPr lang="en-GB" i="1" smtClean="0">
+                      <a:rPr lang="en-GB" sz="2400" i="1" smtClean="0">
                         <a:latin typeface="Cambria Math" panose="02040503050406030204" pitchFamily="18" charset="0"/>
                         <a:ea typeface="Cambria Math" panose="02040503050406030204" pitchFamily="18" charset="0"/>
                       </a:rPr>
@@ -7196,7 +7196,7 @@
                     <m:f>
                       <m:fPr>
                         <m:ctrlPr>
-                          <a:rPr lang="en-GB" b="0" i="1" smtClean="0">
+                          <a:rPr lang="en-GB" sz="2400" b="0" i="1" smtClean="0">
                             <a:latin typeface="Cambria Math" panose="02040503050406030204" pitchFamily="18" charset="0"/>
                             <a:ea typeface="Cambria Math" panose="02040503050406030204" pitchFamily="18" charset="0"/>
                           </a:rPr>
@@ -7204,7 +7204,7 @@
                       </m:fPr>
                       <m:num>
                         <m:r>
-                          <a:rPr lang="en-GB" b="0" i="1" smtClean="0">
+                          <a:rPr lang="en-GB" sz="2400" b="0" i="1" smtClean="0">
                             <a:latin typeface="Cambria Math" panose="02040503050406030204" pitchFamily="18" charset="0"/>
                             <a:ea typeface="Cambria Math" panose="02040503050406030204" pitchFamily="18" charset="0"/>
                           </a:rPr>
@@ -7213,7 +7213,7 @@
                       </m:num>
                       <m:den>
                         <m:r>
-                          <a:rPr lang="en-GB" b="0" i="1" smtClean="0">
+                          <a:rPr lang="en-GB" sz="2400" b="0" i="1" smtClean="0">
                             <a:latin typeface="Cambria Math" panose="02040503050406030204" pitchFamily="18" charset="0"/>
                             <a:ea typeface="Cambria Math" panose="02040503050406030204" pitchFamily="18" charset="0"/>
                           </a:rPr>
@@ -7226,7 +7226,7 @@
                         <m:chr m:val="∑"/>
                         <m:supHide m:val="on"/>
                         <m:ctrlPr>
-                          <a:rPr lang="en-GB" i="1" smtClean="0">
+                          <a:rPr lang="en-GB" sz="2400" i="1" smtClean="0">
                             <a:latin typeface="Cambria Math" panose="02040503050406030204" pitchFamily="18" charset="0"/>
                           </a:rPr>
                         </m:ctrlPr>
@@ -7236,13 +7236,13 @@
                           <m:rPr>
                             <m:brk m:alnAt="7"/>
                           </m:rPr>
-                          <a:rPr lang="en-GB" i="1" smtClean="0">
+                          <a:rPr lang="en-GB" sz="2400" i="1" smtClean="0">
                             <a:latin typeface="Cambria Math" panose="02040503050406030204" pitchFamily="18" charset="0"/>
                           </a:rPr>
                           <m:t>𝑦</m:t>
                         </m:r>
                         <m:r>
-                          <a:rPr lang="en-GB" i="1" smtClean="0">
+                          <a:rPr lang="en-GB" sz="2400" i="1" smtClean="0">
                             <a:latin typeface="Cambria Math" panose="02040503050406030204" pitchFamily="18" charset="0"/>
                           </a:rPr>
                           <m:t>𝑒𝑎𝑟𝑙𝑦</m:t>
@@ -7253,14 +7253,14 @@
                         <m:sSub>
                           <m:sSubPr>
                             <m:ctrlPr>
-                              <a:rPr lang="en-GB" b="0" i="1" smtClean="0">
+                              <a:rPr lang="en-GB" sz="2400" b="0" i="1" smtClean="0">
                                 <a:latin typeface="Cambria Math" panose="02040503050406030204" pitchFamily="18" charset="0"/>
                               </a:rPr>
                             </m:ctrlPr>
                           </m:sSubPr>
                           <m:e>
                             <m:r>
-                              <a:rPr lang="en-GB" b="0" i="1" smtClean="0">
+                              <a:rPr lang="en-GB" sz="2400" b="0" i="1" smtClean="0">
                                 <a:latin typeface="Cambria Math" panose="02040503050406030204" pitchFamily="18" charset="0"/>
                               </a:rPr>
                               <m:t>𝑆</m:t>
@@ -7268,7 +7268,7 @@
                           </m:e>
                           <m:sub>
                             <m:r>
-                              <a:rPr lang="en-GB" i="1" smtClean="0">
+                              <a:rPr lang="en-GB" sz="2400" i="1" smtClean="0">
                                 <a:latin typeface="Cambria Math" panose="02040503050406030204" pitchFamily="18" charset="0"/>
                               </a:rPr>
                               <m:t>𝑡</m:t>
@@ -7278,14 +7278,14 @@
                       </m:e>
                     </m:nary>
                     <m:r>
-                      <a:rPr lang="en-GB" i="1" smtClean="0">
+                      <a:rPr lang="en-GB" sz="2400" i="1" smtClean="0">
                         <a:latin typeface="Cambria Math" panose="02040503050406030204" pitchFamily="18" charset="0"/>
                         <a:ea typeface="Cambria Math" panose="02040503050406030204" pitchFamily="18" charset="0"/>
                       </a:rPr>
                       <m:t>&gt;</m:t>
                     </m:r>
                     <m:r>
-                      <a:rPr lang="en-GB" b="0" i="1" smtClean="0">
+                      <a:rPr lang="en-GB" sz="2400" b="0" i="1" smtClean="0">
                         <a:latin typeface="Cambria Math" panose="02040503050406030204" pitchFamily="18" charset="0"/>
                         <a:ea typeface="Cambria Math" panose="02040503050406030204" pitchFamily="18" charset="0"/>
                       </a:rPr>
@@ -7294,7 +7294,7 @@
                   </m:oMath>
                 </a14:m>
                 <a:r>
-                  <a:rPr lang="en-GB" dirty="0"/>
+                  <a:rPr lang="en-GB" sz="2400" dirty="0"/>
                   <a:t> </a:t>
                 </a:r>
               </a:p>
@@ -7303,10 +7303,10 @@
                   <a:buNone/>
                 </a:pPr>
                 <a:r>
-                  <a:rPr lang="en-GB" sz="1600" dirty="0"/>
+                  <a:rPr lang="en-GB" sz="2000" dirty="0"/>
                   <a:t>(the arithmetic mean is always higher than the geometric mean)</a:t>
                 </a:r>
-                <a:endParaRPr lang="en-GB" dirty="0"/>
+                <a:endParaRPr lang="en-GB" sz="2400" dirty="0"/>
               </a:p>
               <a:p>
                 <a:pPr marL="457200" lvl="1" indent="0" algn="ctr">
@@ -7318,7 +7318,7 @@
                       <m:f>
                         <m:fPr>
                           <m:ctrlPr>
-                            <a:rPr lang="en-GB" b="0" i="1" smtClean="0">
+                            <a:rPr lang="en-GB" sz="2400" b="0" i="1" smtClean="0">
                               <a:latin typeface="Cambria Math" panose="02040503050406030204" pitchFamily="18" charset="0"/>
                               <a:ea typeface="Cambria Math" panose="02040503050406030204" pitchFamily="18" charset="0"/>
                             </a:rPr>
@@ -7326,7 +7326,7 @@
                         </m:fPr>
                         <m:num>
                           <m:r>
-                            <a:rPr lang="en-GB" b="0" i="1" smtClean="0">
+                            <a:rPr lang="en-GB" sz="2400" b="0" i="1" smtClean="0">
                               <a:latin typeface="Cambria Math" panose="02040503050406030204" pitchFamily="18" charset="0"/>
                               <a:ea typeface="Cambria Math" panose="02040503050406030204" pitchFamily="18" charset="0"/>
                             </a:rPr>
@@ -7335,7 +7335,7 @@
                         </m:num>
                         <m:den>
                           <m:r>
-                            <a:rPr lang="en-GB" b="0" i="1" smtClean="0">
+                            <a:rPr lang="en-GB" sz="2400" b="0" i="1" smtClean="0">
                               <a:latin typeface="Cambria Math" panose="02040503050406030204" pitchFamily="18" charset="0"/>
                               <a:ea typeface="Cambria Math" panose="02040503050406030204" pitchFamily="18" charset="0"/>
                             </a:rPr>
@@ -7348,7 +7348,7 @@
                           <m:chr m:val="∑"/>
                           <m:supHide m:val="on"/>
                           <m:ctrlPr>
-                            <a:rPr lang="en-GB" i="1" smtClean="0">
+                            <a:rPr lang="en-GB" sz="2400" i="1" smtClean="0">
                               <a:latin typeface="Cambria Math" panose="02040503050406030204" pitchFamily="18" charset="0"/>
                             </a:rPr>
                           </m:ctrlPr>
@@ -7358,13 +7358,13 @@
                             <m:rPr>
                               <m:brk m:alnAt="7"/>
                             </m:rPr>
-                            <a:rPr lang="en-GB" i="1" smtClean="0">
+                            <a:rPr lang="en-GB" sz="2400" i="1" smtClean="0">
                               <a:latin typeface="Cambria Math" panose="02040503050406030204" pitchFamily="18" charset="0"/>
                             </a:rPr>
                             <m:t>𝑦</m:t>
                           </m:r>
                           <m:r>
-                            <a:rPr lang="en-GB" i="1" smtClean="0">
+                            <a:rPr lang="en-GB" sz="2400" i="1" smtClean="0">
                               <a:latin typeface="Cambria Math" panose="02040503050406030204" pitchFamily="18" charset="0"/>
                             </a:rPr>
                             <m:t>𝑒𝑎𝑟𝑙𝑦</m:t>
@@ -7375,14 +7375,14 @@
                           <m:sSub>
                             <m:sSubPr>
                               <m:ctrlPr>
-                                <a:rPr lang="en-GB" b="0" i="1" smtClean="0">
+                                <a:rPr lang="en-GB" sz="2400" b="0" i="1" smtClean="0">
                                   <a:latin typeface="Cambria Math" panose="02040503050406030204" pitchFamily="18" charset="0"/>
                                 </a:rPr>
                               </m:ctrlPr>
                             </m:sSubPr>
                             <m:e>
                               <m:r>
-                                <a:rPr lang="en-GB" b="0" i="1" smtClean="0">
+                                <a:rPr lang="en-GB" sz="2400" b="0" i="1" smtClean="0">
                                   <a:latin typeface="Cambria Math" panose="02040503050406030204" pitchFamily="18" charset="0"/>
                                 </a:rPr>
                                 <m:t>𝑆𝐴</m:t>
@@ -7390,7 +7390,7 @@
                             </m:e>
                             <m:sub>
                               <m:r>
-                                <a:rPr lang="en-GB" i="1" smtClean="0">
+                                <a:rPr lang="en-GB" sz="2400" i="1" smtClean="0">
                                   <a:latin typeface="Cambria Math" panose="02040503050406030204" pitchFamily="18" charset="0"/>
                                 </a:rPr>
                                 <m:t>𝑡</m:t>
@@ -7400,7 +7400,7 @@
                         </m:e>
                       </m:nary>
                       <m:r>
-                        <a:rPr lang="en-GB" i="1" smtClean="0">
+                        <a:rPr lang="en-GB" sz="2400" i="1" smtClean="0">
                           <a:latin typeface="Cambria Math" panose="02040503050406030204" pitchFamily="18" charset="0"/>
                           <a:ea typeface="Cambria Math" panose="02040503050406030204" pitchFamily="18" charset="0"/>
                         </a:rPr>
@@ -7409,7 +7409,7 @@
                       <m:f>
                         <m:fPr>
                           <m:ctrlPr>
-                            <a:rPr lang="en-GB" i="1" smtClean="0">
+                            <a:rPr lang="en-GB" sz="2400" i="1" smtClean="0">
                               <a:latin typeface="Cambria Math" panose="02040503050406030204" pitchFamily="18" charset="0"/>
                               <a:ea typeface="Cambria Math" panose="02040503050406030204" pitchFamily="18" charset="0"/>
                             </a:rPr>
@@ -7417,7 +7417,7 @@
                         </m:fPr>
                         <m:num>
                           <m:r>
-                            <a:rPr lang="en-GB" i="1" smtClean="0">
+                            <a:rPr lang="en-GB" sz="2400" i="1" smtClean="0">
                               <a:latin typeface="Cambria Math" panose="02040503050406030204" pitchFamily="18" charset="0"/>
                               <a:ea typeface="Cambria Math" panose="02040503050406030204" pitchFamily="18" charset="0"/>
                             </a:rPr>
@@ -7426,7 +7426,7 @@
                         </m:num>
                         <m:den>
                           <m:r>
-                            <a:rPr lang="en-GB" i="1" smtClean="0">
+                            <a:rPr lang="en-GB" sz="2400" i="1" smtClean="0">
                               <a:latin typeface="Cambria Math" panose="02040503050406030204" pitchFamily="18" charset="0"/>
                               <a:ea typeface="Cambria Math" panose="02040503050406030204" pitchFamily="18" charset="0"/>
                             </a:rPr>
@@ -7439,7 +7439,7 @@
                           <m:chr m:val="∑"/>
                           <m:supHide m:val="on"/>
                           <m:ctrlPr>
-                            <a:rPr lang="en-GB" i="1" smtClean="0">
+                            <a:rPr lang="en-GB" sz="2400" i="1" smtClean="0">
                               <a:latin typeface="Cambria Math" panose="02040503050406030204" pitchFamily="18" charset="0"/>
                             </a:rPr>
                           </m:ctrlPr>
@@ -7449,13 +7449,13 @@
                             <m:rPr>
                               <m:brk m:alnAt="7"/>
                             </m:rPr>
-                            <a:rPr lang="en-GB" i="1" smtClean="0">
+                            <a:rPr lang="en-GB" sz="2400" i="1" smtClean="0">
                               <a:latin typeface="Cambria Math" panose="02040503050406030204" pitchFamily="18" charset="0"/>
                             </a:rPr>
                             <m:t>𝑦</m:t>
                           </m:r>
                           <m:r>
-                            <a:rPr lang="en-GB" i="1" smtClean="0">
+                            <a:rPr lang="en-GB" sz="2400" i="1" smtClean="0">
                               <a:latin typeface="Cambria Math" panose="02040503050406030204" pitchFamily="18" charset="0"/>
                             </a:rPr>
                             <m:t>𝑒𝑎𝑟𝑙𝑦</m:t>
@@ -7466,14 +7466,14 @@
                           <m:sSub>
                             <m:sSubPr>
                               <m:ctrlPr>
-                                <a:rPr lang="en-GB" b="0" i="1" smtClean="0">
+                                <a:rPr lang="en-GB" sz="2400" b="0" i="1" smtClean="0">
                                   <a:latin typeface="Cambria Math" panose="02040503050406030204" pitchFamily="18" charset="0"/>
                                 </a:rPr>
                               </m:ctrlPr>
                             </m:sSubPr>
                             <m:e>
                               <m:r>
-                                <a:rPr lang="en-GB" b="0" i="1" smtClean="0">
+                                <a:rPr lang="en-GB" sz="2400" b="0" i="1" smtClean="0">
                                   <a:latin typeface="Cambria Math" panose="02040503050406030204" pitchFamily="18" charset="0"/>
                                 </a:rPr>
                                 <m:t>𝑌</m:t>
@@ -7481,7 +7481,7 @@
                             </m:e>
                             <m:sub>
                               <m:r>
-                                <a:rPr lang="en-GB" i="1" smtClean="0">
+                                <a:rPr lang="en-GB" sz="2400" i="1" smtClean="0">
                                   <a:latin typeface="Cambria Math" panose="02040503050406030204" pitchFamily="18" charset="0"/>
                                 </a:rPr>
                                 <m:t>𝑡</m:t>
@@ -7493,7 +7493,7 @@
                     </m:oMath>
                   </m:oMathPara>
                 </a14:m>
-                <a:endParaRPr lang="en-GB" dirty="0"/>
+                <a:endParaRPr lang="en-GB" sz="2400" dirty="0"/>
               </a:p>
               <a:p>
                 <a:pPr marL="0" indent="0" algn="ctr">
@@ -7518,14 +7518,14 @@
                 <a:spLocks noGrp="1" noRot="1" noChangeAspect="1" noMove="1" noResize="1" noEditPoints="1" noAdjustHandles="1" noChangeArrowheads="1" noChangeShapeType="1" noTextEdit="1"/>
               </p:cNvSpPr>
               <p:nvPr>
-                <p:ph idx="1"/>
+                <p:ph sz="half" idx="2"/>
               </p:nvPr>
             </p:nvSpPr>
             <p:spPr>
               <a:blipFill>
                 <a:blip r:embed="rId2"/>
                 <a:stretch>
-                  <a:fillRect l="-58" t="-1099"/>
+                  <a:fillRect l="-754" t="-2341"/>
                 </a:stretch>
               </a:blipFill>
             </p:spPr>
@@ -7557,10 +7557,15 @@
             <a:spLocks noGrp="1"/>
           </p:cNvSpPr>
           <p:nvPr>
-            <p:ph type="ftr" sz="quarter" idx="11"/>
+            <p:ph type="ftr" sz="quarter" idx="4294967295"/>
           </p:nvPr>
         </p:nvSpPr>
-        <p:spPr/>
+        <p:spPr>
+          <a:xfrm>
+            <a:off x="0" y="0"/>
+            <a:ext cx="0" cy="0"/>
+          </a:xfrm>
+        </p:spPr>
         <p:txBody>
           <a:bodyPr/>
           <a:lstStyle/>
@@ -7644,67 +7649,67 @@
             <a:spLocks noGrp="1"/>
           </p:cNvSpPr>
           <p:nvPr>
-            <p:ph idx="1"/>
+            <p:ph sz="half" idx="2"/>
           </p:nvPr>
         </p:nvSpPr>
-        <p:spPr/>
+        <p:spPr>
+          <a:xfrm>
+            <a:off x="970723" y="1406106"/>
+            <a:ext cx="6436861" cy="4690021"/>
+          </a:xfrm>
+        </p:spPr>
         <p:txBody>
           <a:bodyPr/>
           <a:lstStyle/>
           <a:p>
             <a:r>
-              <a:rPr lang="en-GB" dirty="0"/>
+              <a:rPr lang="en-GB" sz="2400" dirty="0"/>
               <a:t>Avoid log transformations (multiplicative X11)</a:t>
             </a:r>
           </a:p>
           <a:p>
             <a:r>
-              <a:rPr lang="en-GB" dirty="0"/>
+              <a:rPr lang="en-GB" sz="2400" dirty="0"/>
               <a:t>Correct S, I and T for their average bias on the whole series (</a:t>
             </a:r>
             <a:r>
-              <a:rPr lang="en-GB" dirty="0" err="1"/>
+              <a:rPr lang="en-GB" sz="2400" dirty="0" err="1"/>
               <a:t>Tramo</a:t>
             </a:r>
             <a:r>
-              <a:rPr lang="en-GB" dirty="0"/>
+              <a:rPr lang="en-GB" sz="2400" dirty="0"/>
               <a:t>)</a:t>
             </a:r>
           </a:p>
           <a:p>
             <a:pPr lvl="1"/>
             <a:r>
-              <a:rPr lang="en-GB" dirty="0"/>
+              <a:rPr lang="en-GB" sz="2000" dirty="0"/>
               <a:t>But…</a:t>
             </a:r>
           </a:p>
           <a:p>
             <a:pPr lvl="1"/>
-            <a:endParaRPr lang="en-GB" dirty="0"/>
-          </a:p>
-          <a:p>
-            <a:pPr lvl="1"/>
-            <a:endParaRPr lang="en-GB" dirty="0"/>
-          </a:p>
-          <a:p>
-            <a:pPr lvl="1"/>
-            <a:endParaRPr lang="en-GB" dirty="0"/>
+            <a:endParaRPr lang="en-GB" sz="2000" dirty="0"/>
           </a:p>
           <a:p>
             <a:r>
-              <a:rPr lang="en-GB" dirty="0"/>
-              <a:t>Don’t correct the bias (SA below the raw figures)</a:t>
+              <a:rPr lang="en-GB" sz="2400" dirty="0"/>
+              <a:t>Don’t correct the bias</a:t>
             </a:r>
           </a:p>
           <a:p>
             <a:r>
-              <a:rPr lang="en-GB" dirty="0"/>
+              <a:rPr lang="en-GB" sz="2400" dirty="0"/>
               <a:t>Experimental options (X12): smooth correction</a:t>
             </a:r>
           </a:p>
           <a:p>
+            <a:endParaRPr lang="en-GB" sz="2400" dirty="0"/>
+          </a:p>
+          <a:p>
             <a:r>
-              <a:rPr lang="en-GB" dirty="0"/>
+              <a:rPr lang="en-GB" sz="2400" dirty="0"/>
               <a:t>Don’t correct and apply benchmarking</a:t>
             </a:r>
           </a:p>
@@ -7726,10 +7731,15 @@
             <a:spLocks noGrp="1"/>
           </p:cNvSpPr>
           <p:nvPr>
-            <p:ph type="ftr" sz="quarter" idx="11"/>
+            <p:ph type="ftr" sz="quarter" idx="4294967295"/>
           </p:nvPr>
         </p:nvSpPr>
-        <p:spPr/>
+        <p:spPr>
+          <a:xfrm>
+            <a:off x="0" y="0"/>
+            <a:ext cx="0" cy="0"/>
+          </a:xfrm>
+        </p:spPr>
         <p:txBody>
           <a:bodyPr/>
           <a:lstStyle/>
@@ -7763,8 +7773,8 @@
         </p:blipFill>
         <p:spPr>
           <a:xfrm>
-            <a:off x="8462866" y="3877578"/>
-            <a:ext cx="2789270" cy="1297897"/>
+            <a:off x="7772400" y="2849526"/>
+            <a:ext cx="3349106" cy="1558398"/>
           </a:xfrm>
           <a:prstGeom prst="rect">
             <a:avLst/>
@@ -7793,8 +7803,8 @@
         </p:blipFill>
         <p:spPr>
           <a:xfrm>
-            <a:off x="3625233" y="2941184"/>
-            <a:ext cx="2658641" cy="1313953"/>
+            <a:off x="7772400" y="729259"/>
+            <a:ext cx="3349105" cy="1659396"/>
           </a:xfrm>
           <a:prstGeom prst="rect">
             <a:avLst/>
@@ -7823,14 +7833,139 @@
         </p:blipFill>
         <p:spPr>
           <a:xfrm>
-            <a:off x="8462865" y="5282512"/>
-            <a:ext cx="2743199" cy="1403497"/>
+            <a:off x="7863861" y="4626280"/>
+            <a:ext cx="3257645" cy="1666702"/>
           </a:xfrm>
           <a:prstGeom prst="rect">
             <a:avLst/>
           </a:prstGeom>
         </p:spPr>
       </p:pic>
+      <p:cxnSp>
+        <p:nvCxnSpPr>
+          <p:cNvPr id="6" name="Connecteur droit avec flèche 5">
+            <a:extLst>
+              <a:ext uri="{FF2B5EF4-FFF2-40B4-BE49-F238E27FC236}">
+                <a16:creationId xmlns:a16="http://schemas.microsoft.com/office/drawing/2014/main" id="{C0EEE718-838B-3065-7596-B2FADEDBED71}"/>
+              </a:ext>
+            </a:extLst>
+          </p:cNvPr>
+          <p:cNvCxnSpPr>
+            <a:cxnSpLocks/>
+          </p:cNvCxnSpPr>
+          <p:nvPr/>
+        </p:nvCxnSpPr>
+        <p:spPr>
+          <a:xfrm flipV="1">
+            <a:off x="4607095" y="2388655"/>
+            <a:ext cx="4885588" cy="812208"/>
+          </a:xfrm>
+          <a:prstGeom prst="straightConnector1">
+            <a:avLst/>
+          </a:prstGeom>
+          <a:ln w="57150">
+            <a:tailEnd type="triangle"/>
+          </a:ln>
+        </p:spPr>
+        <p:style>
+          <a:lnRef idx="1">
+            <a:schemeClr val="accent1"/>
+          </a:lnRef>
+          <a:fillRef idx="0">
+            <a:schemeClr val="accent1"/>
+          </a:fillRef>
+          <a:effectRef idx="0">
+            <a:schemeClr val="accent1"/>
+          </a:effectRef>
+          <a:fontRef idx="minor">
+            <a:schemeClr val="tx1"/>
+          </a:fontRef>
+        </p:style>
+      </p:cxnSp>
+      <p:cxnSp>
+        <p:nvCxnSpPr>
+          <p:cNvPr id="18" name="Connecteur droit avec flèche 17">
+            <a:extLst>
+              <a:ext uri="{FF2B5EF4-FFF2-40B4-BE49-F238E27FC236}">
+                <a16:creationId xmlns:a16="http://schemas.microsoft.com/office/drawing/2014/main" id="{D7BF1FB8-E54E-00B9-1101-559902113F22}"/>
+              </a:ext>
+            </a:extLst>
+          </p:cNvPr>
+          <p:cNvCxnSpPr>
+            <a:cxnSpLocks/>
+            <a:endCxn id="9" idx="1"/>
+          </p:cNvCxnSpPr>
+          <p:nvPr/>
+        </p:nvCxnSpPr>
+        <p:spPr>
+          <a:xfrm flipV="1">
+            <a:off x="4784651" y="3628725"/>
+            <a:ext cx="2987749" cy="326587"/>
+          </a:xfrm>
+          <a:prstGeom prst="straightConnector1">
+            <a:avLst/>
+          </a:prstGeom>
+          <a:ln w="57150">
+            <a:tailEnd type="triangle"/>
+          </a:ln>
+        </p:spPr>
+        <p:style>
+          <a:lnRef idx="1">
+            <a:schemeClr val="accent1"/>
+          </a:lnRef>
+          <a:fillRef idx="0">
+            <a:schemeClr val="accent1"/>
+          </a:fillRef>
+          <a:effectRef idx="0">
+            <a:schemeClr val="accent1"/>
+          </a:effectRef>
+          <a:fontRef idx="minor">
+            <a:schemeClr val="tx1"/>
+          </a:fontRef>
+        </p:style>
+      </p:cxnSp>
+      <p:cxnSp>
+        <p:nvCxnSpPr>
+          <p:cNvPr id="21" name="Connecteur droit avec flèche 20">
+            <a:extLst>
+              <a:ext uri="{FF2B5EF4-FFF2-40B4-BE49-F238E27FC236}">
+                <a16:creationId xmlns:a16="http://schemas.microsoft.com/office/drawing/2014/main" id="{62B06804-679F-E925-E8A2-77098F92326C}"/>
+              </a:ext>
+            </a:extLst>
+          </p:cNvPr>
+          <p:cNvCxnSpPr>
+            <a:cxnSpLocks/>
+            <a:endCxn id="13" idx="1"/>
+          </p:cNvCxnSpPr>
+          <p:nvPr/>
+        </p:nvCxnSpPr>
+        <p:spPr>
+          <a:xfrm flipV="1">
+            <a:off x="6826102" y="5459631"/>
+            <a:ext cx="1037759" cy="175625"/>
+          </a:xfrm>
+          <a:prstGeom prst="straightConnector1">
+            <a:avLst/>
+          </a:prstGeom>
+          <a:ln w="57150">
+            <a:tailEnd type="triangle"/>
+          </a:ln>
+        </p:spPr>
+        <p:style>
+          <a:lnRef idx="1">
+            <a:schemeClr val="accent1"/>
+          </a:lnRef>
+          <a:fillRef idx="0">
+            <a:schemeClr val="accent1"/>
+          </a:fillRef>
+          <a:effectRef idx="0">
+            <a:schemeClr val="accent1"/>
+          </a:effectRef>
+          <a:fontRef idx="minor">
+            <a:schemeClr val="tx1"/>
+          </a:fontRef>
+        </p:style>
+      </p:cxnSp>
     </p:spTree>
     <p:extLst>
       <p:ext uri="{BB962C8B-B14F-4D97-AF65-F5344CB8AC3E}">
@@ -7999,7 +8134,7 @@
             <a:spLocks noGrp="1"/>
           </p:cNvSpPr>
           <p:nvPr>
-            <p:ph idx="1"/>
+            <p:ph sz="half" idx="2"/>
           </p:nvPr>
         </p:nvSpPr>
         <p:spPr/>
@@ -8008,13 +8143,13 @@
           <a:lstStyle/>
           <a:p>
             <a:r>
-              <a:rPr lang="en-GB" dirty="0"/>
+              <a:rPr lang="en-GB" sz="2400" dirty="0"/>
               <a:t>Bias correction will generate some revisions (constant factor)</a:t>
             </a:r>
           </a:p>
           <a:p>
             <a:r>
-              <a:rPr lang="en-GB" dirty="0"/>
+              <a:rPr lang="en-GB" sz="2400" dirty="0"/>
               <a:t>Currently no good solution in JD+ if the seasonal factors highly differ following the periods</a:t>
             </a:r>
           </a:p>
@@ -8033,10 +8168,15 @@
             <a:spLocks noGrp="1"/>
           </p:cNvSpPr>
           <p:nvPr>
-            <p:ph type="ftr" sz="quarter" idx="11"/>
+            <p:ph type="ftr" sz="quarter" idx="4294967295"/>
           </p:nvPr>
         </p:nvSpPr>
-        <p:spPr/>
+        <p:spPr>
+          <a:xfrm>
+            <a:off x="0" y="0"/>
+            <a:ext cx="0" cy="0"/>
+          </a:xfrm>
+        </p:spPr>
         <p:txBody>
           <a:bodyPr/>
           <a:lstStyle/>
@@ -9013,15 +9153,6 @@
 </file>
 
 <file path=customXml/item1.xml><?xml version="1.0" encoding="utf-8"?>
-<?mso-contentType ?>
-<FormTemplates xmlns="http://schemas.microsoft.com/sharepoint/v3/contenttype/forms">
-  <Display>DocumentLibraryForm</Display>
-  <Edit>DocumentLibraryForm</Edit>
-  <New>DocumentLibraryForm</New>
-</FormTemplates>
-</file>
-
-<file path=customXml/item2.xml><?xml version="1.0" encoding="utf-8"?>
 <ct:contentTypeSchema xmlns:ct="http://schemas.microsoft.com/office/2006/metadata/contentType" xmlns:ma="http://schemas.microsoft.com/office/2006/metadata/properties/metaAttributes" ct:_="" ma:_="" ma:contentTypeName="Document" ma:contentTypeID="0x010100E6AA5C57F8EADE4E9CD6BB064C0C3195" ma:contentTypeVersion="16" ma:contentTypeDescription="Create a new document." ma:contentTypeScope="" ma:versionID="bb51c19a58f458ddcddd050a07659236">
   <xsd:schema xmlns:xsd="http://www.w3.org/2001/XMLSchema" xmlns:xs="http://www.w3.org/2001/XMLSchema" xmlns:p="http://schemas.microsoft.com/office/2006/metadata/properties" xmlns:ns2="0e422b70-e85d-4377-8ee0-b6227433d381" xmlns:ns3="199f642e-5af9-486c-ac06-f366742ef41a" targetNamespace="http://schemas.microsoft.com/office/2006/metadata/properties" ma:root="true" ma:fieldsID="0ee7a3bac0352a48a43420936abd968a" ns2:_="" ns3:_="">
     <xsd:import namespace="0e422b70-e85d-4377-8ee0-b6227433d381"/>
@@ -9262,6 +9393,15 @@
 </ct:contentTypeSchema>
 </file>
 
+<file path=customXml/item2.xml><?xml version="1.0" encoding="utf-8"?>
+<?mso-contentType ?>
+<FormTemplates xmlns="http://schemas.microsoft.com/sharepoint/v3/contenttype/forms">
+  <Display>DocumentLibraryForm</Display>
+  <Edit>DocumentLibraryForm</Edit>
+  <New>DocumentLibraryForm</New>
+</FormTemplates>
+</file>
+
 <file path=customXml/item3.xml><?xml version="1.0" encoding="utf-8"?>
 <p:properties xmlns:p="http://schemas.microsoft.com/office/2006/metadata/properties" xmlns:xsi="http://www.w3.org/2001/XMLSchema-instance" xmlns:pc="http://schemas.microsoft.com/office/infopath/2007/PartnerControls">
   <documentManagement>
@@ -9274,14 +9414,6 @@
 </file>
 
 <file path=customXml/itemProps1.xml><?xml version="1.0" encoding="utf-8"?>
-<ds:datastoreItem xmlns:ds="http://schemas.openxmlformats.org/officeDocument/2006/customXml" ds:itemID="{67DD9E9F-9EEB-4105-B29B-819486C2855A}">
-  <ds:schemaRefs>
-    <ds:schemaRef ds:uri="http://schemas.microsoft.com/sharepoint/v3/contenttype/forms"/>
-  </ds:schemaRefs>
-</ds:datastoreItem>
-</file>
-
-<file path=customXml/itemProps2.xml><?xml version="1.0" encoding="utf-8"?>
 <ds:datastoreItem xmlns:ds="http://schemas.openxmlformats.org/officeDocument/2006/customXml" ds:itemID="{04B464EA-1576-49DD-9675-1E3399D4D196}">
   <ds:schemaRefs>
     <ds:schemaRef ds:uri="http://schemas.microsoft.com/office/2006/metadata/contentType"/>
@@ -9296,6 +9428,14 @@
     <ds:schemaRef ds:uri="http://purl.org/dc/elements/1.1/"/>
     <ds:schemaRef ds:uri="http://purl.org/dc/terms/"/>
     <ds:schemaRef ds:uri="http://schemas.microsoft.com/internal/obd"/>
+  </ds:schemaRefs>
+</ds:datastoreItem>
+</file>
+
+<file path=customXml/itemProps2.xml><?xml version="1.0" encoding="utf-8"?>
+<ds:datastoreItem xmlns:ds="http://schemas.openxmlformats.org/officeDocument/2006/customXml" ds:itemID="{67DD9E9F-9EEB-4105-B29B-819486C2855A}">
+  <ds:schemaRefs>
+    <ds:schemaRef ds:uri="http://schemas.microsoft.com/sharepoint/v3/contenttype/forms"/>
   </ds:schemaRefs>
 </ds:datastoreItem>
 </file>
